--- a/report/MigrantMoney_Presentation.pptx
+++ b/report/MigrantMoney_Presentation.pptx
@@ -22,6 +22,7 @@
     <p:sldId id="270" r:id="rId21"/>
     <p:sldId id="271" r:id="rId22"/>
     <p:sldId id="272" r:id="rId23"/>
+    <p:sldId id="273" r:id="rId24"/>
   </p:sldIdLst>
   <p:sldSz cx="12191695" cy="6858000" type="screen4x3"/>
   <p:notesSz cx="6858000" cy="9144000"/>
@@ -3276,13 +3277,13 @@
           <a:p>
             <a:pPr algn="l"/>
             <a:r>
-              <a:rPr sz="3000" b="0" i="0">
+              <a:rPr sz="2200" b="0" i="0">
                 <a:solidFill>
                   <a:srgbClr val="A8A8A8"/>
                 </a:solidFill>
                 <a:latin typeface="Helvetica"/>
               </a:rPr>
-              <a:t>The hidden tax on global remittances.</a:t>
+              <a:t>A True Cost Index and stablecoin counterfactual for the global remittance market.</a:t>
             </a:r>
           </a:p>
         </p:txBody>
@@ -3483,7 +3484,7 @@
                 </a:solidFill>
                 <a:latin typeface="Menlo"/>
               </a:rPr>
-              <a:t>09  ·  RESULTS  ·  TOP CORRIDORS</a:t>
+              <a:t>09  ·  METHODOLOGY  ·  REGRESSION</a:t>
             </a:r>
           </a:p>
         </p:txBody>
@@ -3518,7 +3519,7 @@
                 </a:solidFill>
                 <a:latin typeface="Menlo"/>
               </a:rPr>
-              <a:t>10 / 17</a:t>
+              <a:t>10 / 18</a:t>
             </a:r>
           </a:p>
         </p:txBody>
@@ -3566,29 +3567,29 @@
         </p:nvSpPr>
         <p:spPr>
           <a:xfrm>
-            <a:off x="777240" y="1143000"/>
-            <a:ext cx="10515600" cy="640080"/>
-          </a:xfrm>
-          <a:prstGeom prst="rect">
-            <a:avLst/>
-          </a:prstGeom>
-          <a:noFill/>
-        </p:spPr>
-        <p:txBody>
-          <a:bodyPr wrap="square" anchor="t" lIns="0" rIns="0" tIns="0" bIns="0">
-            <a:spAutoFit/>
-          </a:bodyPr>
-          <a:lstStyle/>
-          <a:p>
-            <a:pPr algn="l"/>
-            <a:r>
-              <a:rPr sz="2800" b="1" i="0">
+            <a:off x="777240" y="1463040"/>
+            <a:ext cx="10515600" cy="822960"/>
+          </a:xfrm>
+          <a:prstGeom prst="rect">
+            <a:avLst/>
+          </a:prstGeom>
+          <a:noFill/>
+        </p:spPr>
+        <p:txBody>
+          <a:bodyPr wrap="square" anchor="t" lIns="0" rIns="0" tIns="0" bIns="0">
+            <a:spAutoFit/>
+          </a:bodyPr>
+          <a:lstStyle/>
+          <a:p>
+            <a:pPr algn="l"/>
+            <a:r>
+              <a:rPr sz="4000" b="1" i="0">
                 <a:solidFill>
                   <a:srgbClr val="F2F2F2"/>
                 </a:solidFill>
                 <a:latin typeface="Helvetica Neue"/>
               </a:rPr>
-              <a:t>Top 20 most expensive corridors.</a:t>
+              <a:t>Two-way fixed-effects panel.</a:t>
             </a:r>
           </a:p>
         </p:txBody>
@@ -3601,102 +3602,173 @@
         </p:nvSpPr>
         <p:spPr>
           <a:xfrm>
-            <a:off x="777240" y="1691640"/>
-            <a:ext cx="10515600" cy="365760"/>
-          </a:xfrm>
-          <a:prstGeom prst="rect">
-            <a:avLst/>
-          </a:prstGeom>
-          <a:noFill/>
-        </p:spPr>
-        <p:txBody>
-          <a:bodyPr wrap="square" anchor="t" lIns="0" rIns="0" tIns="0" bIns="0">
-            <a:spAutoFit/>
-          </a:bodyPr>
-          <a:lstStyle/>
-          <a:p>
-            <a:pPr algn="l"/>
-            <a:r>
-              <a:rPr sz="1400" b="0" i="0">
+            <a:off x="777240" y="2606040"/>
+            <a:ext cx="10972800" cy="914400"/>
+          </a:xfrm>
+          <a:prstGeom prst="rect">
+            <a:avLst/>
+          </a:prstGeom>
+          <a:noFill/>
+        </p:spPr>
+        <p:txBody>
+          <a:bodyPr wrap="square" anchor="t" lIns="0" rIns="0" tIns="0" bIns="0">
+            <a:spAutoFit/>
+          </a:bodyPr>
+          <a:lstStyle/>
+          <a:p>
+            <a:pPr algn="l"/>
+            <a:r>
+              <a:rPr sz="2200" b="0" i="0">
+                <a:solidFill>
+                  <a:srgbClr val="F2F2F2"/>
+                </a:solidFill>
+                <a:latin typeface="Menlo"/>
+              </a:rPr>
+              <a:t>TCI_ipq  =  β₀  +  Σ β_k · 1{firmType = k}  +  α_corridor  +  γ_quarter  +  ε</a:t>
+            </a:r>
+          </a:p>
+        </p:txBody>
+      </p:sp>
+      <p:sp>
+        <p:nvSpPr>
+          <p:cNvPr id="8" name="TextBox 7"/>
+          <p:cNvSpPr txBox="1"/>
+          <p:nvPr/>
+        </p:nvSpPr>
+        <p:spPr>
+          <a:xfrm>
+            <a:off x="777240" y="3840480"/>
+            <a:ext cx="10515600" cy="457200"/>
+          </a:xfrm>
+          <a:prstGeom prst="rect">
+            <a:avLst/>
+          </a:prstGeom>
+          <a:noFill/>
+        </p:spPr>
+        <p:txBody>
+          <a:bodyPr wrap="square" anchor="t" lIns="0" rIns="0" tIns="0" bIns="0">
+            <a:spAutoFit/>
+          </a:bodyPr>
+          <a:lstStyle/>
+          <a:p>
+            <a:pPr algn="l"/>
+            <a:r>
+              <a:rPr sz="1800" b="0" i="0">
                 <a:solidFill>
                   <a:srgbClr val="A8A8A8"/>
                 </a:solidFill>
                 <a:latin typeface="Helvetica"/>
               </a:rPr>
-              <a:t>Sub-Saharan Africa and small-island Pacific dominate. Latin America is the cheapest.</a:t>
-            </a:r>
-          </a:p>
-        </p:txBody>
-      </p:sp>
-      <p:sp>
-        <p:nvSpPr>
-          <p:cNvPr id="8" name="Rounded Rectangle 7"/>
-          <p:cNvSpPr/>
-          <p:nvPr/>
-        </p:nvSpPr>
-        <p:spPr>
-          <a:xfrm>
-            <a:off x="2493111" y="2075688"/>
-            <a:ext cx="7205472" cy="4626864"/>
-          </a:xfrm>
-          <a:prstGeom prst="roundRect">
-            <a:avLst>
-              <a:gd name="adj" fmla="val 1200"/>
-            </a:avLst>
-          </a:prstGeom>
-          <a:solidFill>
-            <a:srgbClr val="FAFAFA"/>
-          </a:solidFill>
-          <a:ln>
-            <a:noFill/>
-          </a:ln>
-        </p:spPr>
-        <p:style>
-          <a:lnRef idx="1">
-            <a:schemeClr val="accent1"/>
-          </a:lnRef>
-          <a:fillRef idx="3">
-            <a:schemeClr val="accent1"/>
-          </a:fillRef>
-          <a:effectRef idx="2">
-            <a:schemeClr val="accent1"/>
-          </a:effectRef>
-          <a:fontRef idx="minor">
-            <a:schemeClr val="lt1"/>
-          </a:fontRef>
-        </p:style>
-        <p:txBody>
-          <a:bodyPr rtlCol="0" anchor="ctr"/>
-          <a:lstStyle/>
-          <a:p>
-            <a:pPr algn="ctr"/>
-          </a:p>
-        </p:txBody>
-      </p:sp>
-      <p:pic>
-        <p:nvPicPr>
-          <p:cNvPr id="9" name="Picture 8" descr="fig01_top20_corridors.png"/>
-          <p:cNvPicPr>
-            <a:picLocks noChangeAspect="1"/>
-          </p:cNvPicPr>
-          <p:nvPr/>
-        </p:nvPicPr>
-        <p:blipFill>
-          <a:blip r:embed="rId2"/>
-          <a:stretch>
-            <a:fillRect/>
-          </a:stretch>
-        </p:blipFill>
-        <p:spPr>
-          <a:xfrm>
-            <a:off x="2657703" y="2240280"/>
-            <a:ext cx="6876288" cy="4297680"/>
-          </a:xfrm>
-          <a:prstGeom prst="rect">
-            <a:avLst/>
-          </a:prstGeom>
-        </p:spPr>
-      </p:pic>
+              <a:t>Entity FE  ·  corridor (368 levels)  ·  absorbs all corridor-invariant heterogeneity.</a:t>
+            </a:r>
+          </a:p>
+        </p:txBody>
+      </p:sp>
+      <p:sp>
+        <p:nvSpPr>
+          <p:cNvPr id="9" name="TextBox 8"/>
+          <p:cNvSpPr txBox="1"/>
+          <p:nvPr/>
+        </p:nvSpPr>
+        <p:spPr>
+          <a:xfrm>
+            <a:off x="777240" y="4434840"/>
+            <a:ext cx="10515600" cy="457200"/>
+          </a:xfrm>
+          <a:prstGeom prst="rect">
+            <a:avLst/>
+          </a:prstGeom>
+          <a:noFill/>
+        </p:spPr>
+        <p:txBody>
+          <a:bodyPr wrap="square" anchor="t" lIns="0" rIns="0" tIns="0" bIns="0">
+            <a:spAutoFit/>
+          </a:bodyPr>
+          <a:lstStyle/>
+          <a:p>
+            <a:pPr algn="l"/>
+            <a:r>
+              <a:rPr sz="1800" b="0" i="0">
+                <a:solidFill>
+                  <a:srgbClr val="A8A8A8"/>
+                </a:solidFill>
+                <a:latin typeface="Helvetica"/>
+              </a:rPr>
+              <a:t>Time FE  ·  quarter (36 levels)  ·  absorbs aggregate time trends.</a:t>
+            </a:r>
+          </a:p>
+        </p:txBody>
+      </p:sp>
+      <p:sp>
+        <p:nvSpPr>
+          <p:cNvPr id="10" name="TextBox 9"/>
+          <p:cNvSpPr txBox="1"/>
+          <p:nvPr/>
+        </p:nvSpPr>
+        <p:spPr>
+          <a:xfrm>
+            <a:off x="777240" y="5029200"/>
+            <a:ext cx="10515600" cy="457200"/>
+          </a:xfrm>
+          <a:prstGeom prst="rect">
+            <a:avLst/>
+          </a:prstGeom>
+          <a:noFill/>
+        </p:spPr>
+        <p:txBody>
+          <a:bodyPr wrap="square" anchor="t" lIns="0" rIns="0" tIns="0" bIns="0">
+            <a:spAutoFit/>
+          </a:bodyPr>
+          <a:lstStyle/>
+          <a:p>
+            <a:pPr algn="l"/>
+            <a:r>
+              <a:rPr sz="1800" b="0" i="0">
+                <a:solidFill>
+                  <a:srgbClr val="A8A8A8"/>
+                </a:solidFill>
+                <a:latin typeface="Helvetica"/>
+              </a:rPr>
+              <a:t>Reference category  ·  MTO (largest cell)  ·  cluster-robust SE at the corridor level.</a:t>
+            </a:r>
+          </a:p>
+        </p:txBody>
+      </p:sp>
+      <p:sp>
+        <p:nvSpPr>
+          <p:cNvPr id="11" name="TextBox 10"/>
+          <p:cNvSpPr txBox="1"/>
+          <p:nvPr/>
+        </p:nvSpPr>
+        <p:spPr>
+          <a:xfrm>
+            <a:off x="777240" y="5623560"/>
+            <a:ext cx="10515600" cy="457200"/>
+          </a:xfrm>
+          <a:prstGeom prst="rect">
+            <a:avLst/>
+          </a:prstGeom>
+          <a:noFill/>
+        </p:spPr>
+        <p:txBody>
+          <a:bodyPr wrap="square" anchor="t" lIns="0" rIns="0" tIns="0" bIns="0">
+            <a:spAutoFit/>
+          </a:bodyPr>
+          <a:lstStyle/>
+          <a:p>
+            <a:pPr algn="l"/>
+            <a:r>
+              <a:rPr sz="1800" b="0" i="0">
+                <a:solidFill>
+                  <a:srgbClr val="A8A8A8"/>
+                </a:solidFill>
+                <a:latin typeface="Helvetica"/>
+              </a:rPr>
+              <a:t>Implementation  ·  linearmodels.PanelOLS  ·  fit separately for the USD 200 and USD 500 buckets.</a:t>
+            </a:r>
+          </a:p>
+        </p:txBody>
+      </p:sp>
     </p:spTree>
   </p:cSld>
   <p:clrMapOvr>
@@ -3788,7 +3860,7 @@
                 </a:solidFill>
                 <a:latin typeface="Menlo"/>
               </a:rPr>
-              <a:t>10  ·  RESULTS  ·  GEOGRAPHY</a:t>
+              <a:t>10  ·  ARCHITECTURE</a:t>
             </a:r>
           </a:p>
         </p:txBody>
@@ -3823,7 +3895,7 @@
                 </a:solidFill>
                 <a:latin typeface="Menlo"/>
               </a:rPr>
-              <a:t>11 / 17</a:t>
+              <a:t>11 / 18</a:t>
             </a:r>
           </a:p>
         </p:txBody>
@@ -3893,56 +3965,21 @@
                 </a:solidFill>
                 <a:latin typeface="Helvetica Neue"/>
               </a:rPr>
-              <a:t>Where the burden falls.</a:t>
-            </a:r>
-          </a:p>
-        </p:txBody>
-      </p:sp>
-      <p:sp>
-        <p:nvSpPr>
-          <p:cNvPr id="7" name="TextBox 6"/>
-          <p:cNvSpPr txBox="1"/>
-          <p:nvPr/>
-        </p:nvSpPr>
-        <p:spPr>
-          <a:xfrm>
-            <a:off x="777240" y="1691640"/>
-            <a:ext cx="10515600" cy="365760"/>
-          </a:xfrm>
-          <a:prstGeom prst="rect">
-            <a:avLst/>
-          </a:prstGeom>
-          <a:noFill/>
-        </p:spPr>
-        <p:txBody>
-          <a:bodyPr wrap="square" anchor="t" lIns="0" rIns="0" tIns="0" bIns="0">
-            <a:spAutoFit/>
-          </a:bodyPr>
-          <a:lstStyle/>
-          <a:p>
-            <a:pPr algn="l"/>
-            <a:r>
-              <a:rPr sz="1400" b="0" i="0">
-                <a:solidFill>
-                  <a:srgbClr val="A8A8A8"/>
-                </a:solidFill>
-                <a:latin typeface="Helvetica"/>
-              </a:rPr>
-              <a:t>Sending-country annual fee burden, in US dollars.</a:t>
-            </a:r>
-          </a:p>
-        </p:txBody>
-      </p:sp>
-      <p:sp>
-        <p:nvSpPr>
-          <p:cNvPr id="8" name="Rounded Rectangle 7"/>
+              <a:t>From raw RPW to a static dashboard.</a:t>
+            </a:r>
+          </a:p>
+        </p:txBody>
+      </p:sp>
+      <p:sp>
+        <p:nvSpPr>
+          <p:cNvPr id="7" name="Rounded Rectangle 6"/>
           <p:cNvSpPr/>
           <p:nvPr/>
         </p:nvSpPr>
         <p:spPr>
           <a:xfrm>
-            <a:off x="2111095" y="2075688"/>
-            <a:ext cx="7969504" cy="4626864"/>
+            <a:off x="3297120" y="1801368"/>
+            <a:ext cx="5597455" cy="4809744"/>
           </a:xfrm>
           <a:prstGeom prst="roundRect">
             <a:avLst>
@@ -3980,7 +4017,7 @@
       </p:sp>
       <p:pic>
         <p:nvPicPr>
-          <p:cNvPr id="9" name="Picture 8" descr="fig02_world_map.png"/>
+          <p:cNvPr id="8" name="Picture 7" descr="architecture.png"/>
           <p:cNvPicPr>
             <a:picLocks noChangeAspect="1"/>
           </p:cNvPicPr>
@@ -3994,8 +4031,8 @@
         </p:blipFill>
         <p:spPr>
           <a:xfrm>
-            <a:off x="2275687" y="2240280"/>
-            <a:ext cx="7640320" cy="4297680"/>
+            <a:off x="3461712" y="1965960"/>
+            <a:ext cx="5268271" cy="4480560"/>
           </a:xfrm>
           <a:prstGeom prst="rect">
             <a:avLst/>
@@ -4093,7 +4130,7 @@
                 </a:solidFill>
                 <a:latin typeface="Menlo"/>
               </a:rPr>
-              <a:t>11  ·  RESULTS  ·  WHO CHARGES MOST</a:t>
+              <a:t>11  ·  RESULTS  ·  COSTS</a:t>
             </a:r>
           </a:p>
         </p:txBody>
@@ -4128,7 +4165,7 @@
                 </a:solidFill>
                 <a:latin typeface="Menlo"/>
               </a:rPr>
-              <a:t>12 / 17</a:t>
+              <a:t>12 / 18</a:t>
             </a:r>
           </a:p>
         </p:txBody>
@@ -4198,7 +4235,7 @@
                 </a:solidFill>
                 <a:latin typeface="Helvetica Neue"/>
               </a:rPr>
-              <a:t>Banks charge ≈ 4.5 pp more than MTOs.</a:t>
+              <a:t>Top 20 most expensive corridors.</a:t>
             </a:r>
           </a:p>
         </p:txBody>
@@ -4233,7 +4270,7 @@
                 </a:solidFill>
                 <a:latin typeface="Helvetica"/>
               </a:rPr>
-              <a:t>After controlling for corridor and quarter. Mobile-money operators undercut MTOs by ≈ 1.5 pp.</a:t>
+              <a:t>Sub-Saharan Africa and small-island Pacific dominate. Latin America is the cheapest.</a:t>
             </a:r>
           </a:p>
         </p:txBody>
@@ -4246,8 +4283,8 @@
         </p:nvSpPr>
         <p:spPr>
           <a:xfrm>
-            <a:off x="1359255" y="2075688"/>
-            <a:ext cx="9473184" cy="3758184"/>
+            <a:off x="2493111" y="2075688"/>
+            <a:ext cx="7205472" cy="4626864"/>
           </a:xfrm>
           <a:prstGeom prst="roundRect">
             <a:avLst>
@@ -4285,7 +4322,7 @@
       </p:sp>
       <p:pic>
         <p:nvPicPr>
-          <p:cNvPr id="9" name="Picture 8" descr="fig03_operator_forest.png"/>
+          <p:cNvPr id="9" name="Picture 8" descr="fig01_top20_corridors.png"/>
           <p:cNvPicPr>
             <a:picLocks noChangeAspect="1"/>
           </p:cNvPicPr>
@@ -4299,8 +4336,8 @@
         </p:blipFill>
         <p:spPr>
           <a:xfrm>
-            <a:off x="1523847" y="2240280"/>
-            <a:ext cx="9144000" cy="3429000"/>
+            <a:off x="2657703" y="2240280"/>
+            <a:ext cx="6876288" cy="4297680"/>
           </a:xfrm>
           <a:prstGeom prst="rect">
             <a:avLst/>
@@ -4398,7 +4435,7 @@
                 </a:solidFill>
                 <a:latin typeface="Menlo"/>
               </a:rPr>
-              <a:t>12  ·  RESULTS  ·  STABLECOIN</a:t>
+              <a:t>12  ·  RESULTS  ·  OPERATORS</a:t>
             </a:r>
           </a:p>
         </p:txBody>
@@ -4433,7 +4470,7 @@
                 </a:solidFill>
                 <a:latin typeface="Menlo"/>
               </a:rPr>
-              <a:t>13 / 17</a:t>
+              <a:t>13 / 18</a:t>
             </a:r>
           </a:p>
         </p:txBody>
@@ -4503,7 +4540,7 @@
                 </a:solidFill>
                 <a:latin typeface="Helvetica Neue"/>
               </a:rPr>
-              <a:t>Where stablecoin rails save the most.</a:t>
+              <a:t>Banks charge ≈ 4.5 pp more than MTOs.</a:t>
             </a:r>
           </a:p>
         </p:txBody>
@@ -4538,7 +4575,7 @@
                 </a:solidFill>
                 <a:latin typeface="Helvetica"/>
               </a:rPr>
-              <a:t>Each dot is a corridor. X-axis: corridor volume (log). Y-axis: percentage savings on USD 200.</a:t>
+              <a:t>After controlling for corridor and quarter. Mobile-money operators undercut MTOs by ≈ 1.5 pp.</a:t>
             </a:r>
           </a:p>
         </p:txBody>
@@ -4551,8 +4588,8 @@
         </p:nvSpPr>
         <p:spPr>
           <a:xfrm>
-            <a:off x="1738397" y="2075688"/>
-            <a:ext cx="8714901" cy="4626864"/>
+            <a:off x="1359255" y="2075688"/>
+            <a:ext cx="9473184" cy="3758184"/>
           </a:xfrm>
           <a:prstGeom prst="roundRect">
             <a:avLst>
@@ -4590,7 +4627,7 @@
       </p:sp>
       <p:pic>
         <p:nvPicPr>
-          <p:cNvPr id="9" name="Picture 8" descr="fig04_stablecoin_scatter.png"/>
+          <p:cNvPr id="9" name="Picture 8" descr="fig03_operator_forest.png"/>
           <p:cNvPicPr>
             <a:picLocks noChangeAspect="1"/>
           </p:cNvPicPr>
@@ -4604,8 +4641,8 @@
         </p:blipFill>
         <p:spPr>
           <a:xfrm>
-            <a:off x="1902989" y="2240280"/>
-            <a:ext cx="8385717" cy="4297680"/>
+            <a:off x="1523847" y="2240280"/>
+            <a:ext cx="9144000" cy="3429000"/>
           </a:xfrm>
           <a:prstGeom prst="rect">
             <a:avLst/>
@@ -4703,7 +4740,7 @@
                 </a:solidFill>
                 <a:latin typeface="Menlo"/>
               </a:rPr>
-              <a:t>13  ·  RESULTS  ·  DIASPORA BURDEN</a:t>
+              <a:t>13  ·  RESULTS  ·  STABLECOIN</a:t>
             </a:r>
           </a:p>
         </p:txBody>
@@ -4738,7 +4775,7 @@
                 </a:solidFill>
                 <a:latin typeface="Menlo"/>
               </a:rPr>
-              <a:t>14 / 17</a:t>
+              <a:t>14 / 18</a:t>
             </a:r>
           </a:p>
         </p:txBody>
@@ -4808,7 +4845,7 @@
                 </a:solidFill>
                 <a:latin typeface="Helvetica Neue"/>
               </a:rPr>
-              <a:t>Annual burden by sending country.</a:t>
+              <a:t>Where stablecoin rails save the most.</a:t>
             </a:r>
           </a:p>
         </p:txBody>
@@ -4843,7 +4880,7 @@
                 </a:solidFill>
                 <a:latin typeface="Helvetica"/>
               </a:rPr>
-              <a:t>How many dollars each diaspora pays per year on the corridors out of their host country.</a:t>
+              <a:t>Each dot is a corridor. X-axis: corridor volume (log). Y-axis: percentage savings on USD 200.</a:t>
             </a:r>
           </a:p>
         </p:txBody>
@@ -4856,8 +4893,8 @@
         </p:nvSpPr>
         <p:spPr>
           <a:xfrm>
-            <a:off x="1359255" y="2075688"/>
-            <a:ext cx="9473184" cy="3872484"/>
+            <a:off x="1738397" y="2075688"/>
+            <a:ext cx="8714901" cy="4626864"/>
           </a:xfrm>
           <a:prstGeom prst="roundRect">
             <a:avLst>
@@ -4895,7 +4932,7 @@
       </p:sp>
       <p:pic>
         <p:nvPicPr>
-          <p:cNvPr id="9" name="Picture 8" descr="fig05_diaspora_burden.png"/>
+          <p:cNvPr id="9" name="Picture 8" descr="fig04_stablecoin_scatter.png"/>
           <p:cNvPicPr>
             <a:picLocks noChangeAspect="1"/>
           </p:cNvPicPr>
@@ -4909,8 +4946,8 @@
         </p:blipFill>
         <p:spPr>
           <a:xfrm>
-            <a:off x="1523847" y="2240280"/>
-            <a:ext cx="9144000" cy="3543300"/>
+            <a:off x="1902989" y="2240280"/>
+            <a:ext cx="8385717" cy="4297680"/>
           </a:xfrm>
           <a:prstGeom prst="rect">
             <a:avLst/>
@@ -5008,7 +5045,7 @@
                 </a:solidFill>
                 <a:latin typeface="Menlo"/>
               </a:rPr>
-              <a:t>14  ·  HEADLINE FINDING</a:t>
+              <a:t>14  ·  RESULTS  ·  DIASPORA</a:t>
             </a:r>
           </a:p>
         </p:txBody>
@@ -5043,7 +5080,7 @@
                 </a:solidFill>
                 <a:latin typeface="Menlo"/>
               </a:rPr>
-              <a:t>15 / 17</a:t>
+              <a:t>15 / 18</a:t>
             </a:r>
           </a:p>
         </p:txBody>
@@ -5091,453 +5128,137 @@
         </p:nvSpPr>
         <p:spPr>
           <a:xfrm>
-            <a:off x="582015" y="2011680"/>
-            <a:ext cx="3566160" cy="365760"/>
-          </a:xfrm>
-          <a:prstGeom prst="rect">
-            <a:avLst/>
-          </a:prstGeom>
-          <a:noFill/>
-        </p:spPr>
-        <p:txBody>
-          <a:bodyPr wrap="square" anchor="t" lIns="0" rIns="0" tIns="0" bIns="0">
-            <a:spAutoFit/>
-          </a:bodyPr>
-          <a:lstStyle/>
-          <a:p>
-            <a:pPr algn="l"/>
-            <a:r>
-              <a:rPr sz="1000" b="0" i="0">
-                <a:solidFill>
-                  <a:srgbClr val="6B6B6B"/>
-                </a:solidFill>
-                <a:latin typeface="Menlo"/>
-              </a:rPr>
-              <a:t>VOLUME IN SCOPE</a:t>
-            </a:r>
-          </a:p>
-        </p:txBody>
-      </p:sp>
-      <p:cxnSp>
-        <p:nvCxnSpPr>
-          <p:cNvPr id="7" name="Connector 6"/>
-          <p:cNvCxnSpPr/>
-          <p:nvPr/>
-        </p:nvCxnSpPr>
-        <p:spPr>
-          <a:xfrm>
-            <a:off x="582015" y="2395728"/>
-            <a:ext cx="3566160" cy="0"/>
-          </a:xfrm>
-          <a:prstGeom prst="line">
-            <a:avLst/>
-          </a:prstGeom>
-          <a:ln w="6350">
-            <a:solidFill>
-              <a:srgbClr val="242424"/>
-            </a:solidFill>
+            <a:off x="777240" y="1143000"/>
+            <a:ext cx="10515600" cy="640080"/>
+          </a:xfrm>
+          <a:prstGeom prst="rect">
+            <a:avLst/>
+          </a:prstGeom>
+          <a:noFill/>
+        </p:spPr>
+        <p:txBody>
+          <a:bodyPr wrap="square" anchor="t" lIns="0" rIns="0" tIns="0" bIns="0">
+            <a:spAutoFit/>
+          </a:bodyPr>
+          <a:lstStyle/>
+          <a:p>
+            <a:pPr algn="l"/>
+            <a:r>
+              <a:rPr sz="2800" b="1" i="0">
+                <a:solidFill>
+                  <a:srgbClr val="F2F2F2"/>
+                </a:solidFill>
+                <a:latin typeface="Helvetica Neue"/>
+              </a:rPr>
+              <a:t>Annual burden by sending country.</a:t>
+            </a:r>
+          </a:p>
+        </p:txBody>
+      </p:sp>
+      <p:sp>
+        <p:nvSpPr>
+          <p:cNvPr id="7" name="TextBox 6"/>
+          <p:cNvSpPr txBox="1"/>
+          <p:nvPr/>
+        </p:nvSpPr>
+        <p:spPr>
+          <a:xfrm>
+            <a:off x="777240" y="1691640"/>
+            <a:ext cx="10515600" cy="365760"/>
+          </a:xfrm>
+          <a:prstGeom prst="rect">
+            <a:avLst/>
+          </a:prstGeom>
+          <a:noFill/>
+        </p:spPr>
+        <p:txBody>
+          <a:bodyPr wrap="square" anchor="t" lIns="0" rIns="0" tIns="0" bIns="0">
+            <a:spAutoFit/>
+          </a:bodyPr>
+          <a:lstStyle/>
+          <a:p>
+            <a:pPr algn="l"/>
+            <a:r>
+              <a:rPr sz="1400" b="0" i="0">
+                <a:solidFill>
+                  <a:srgbClr val="A8A8A8"/>
+                </a:solidFill>
+                <a:latin typeface="Helvetica"/>
+              </a:rPr>
+              <a:t>How many dollars each diaspora pays per year on the corridors out of their host country.</a:t>
+            </a:r>
+          </a:p>
+        </p:txBody>
+      </p:sp>
+      <p:sp>
+        <p:nvSpPr>
+          <p:cNvPr id="8" name="Rounded Rectangle 7"/>
+          <p:cNvSpPr/>
+          <p:nvPr/>
+        </p:nvSpPr>
+        <p:spPr>
+          <a:xfrm>
+            <a:off x="1359255" y="2075688"/>
+            <a:ext cx="9473184" cy="3872484"/>
+          </a:xfrm>
+          <a:prstGeom prst="roundRect">
+            <a:avLst>
+              <a:gd name="adj" fmla="val 1200"/>
+            </a:avLst>
+          </a:prstGeom>
+          <a:solidFill>
+            <a:srgbClr val="FAFAFA"/>
+          </a:solidFill>
+          <a:ln>
+            <a:noFill/>
           </a:ln>
         </p:spPr>
         <p:style>
-          <a:lnRef idx="2">
+          <a:lnRef idx="1">
             <a:schemeClr val="accent1"/>
           </a:lnRef>
-          <a:fillRef idx="0">
+          <a:fillRef idx="3">
             <a:schemeClr val="accent1"/>
           </a:fillRef>
-          <a:effectRef idx="1">
+          <a:effectRef idx="2">
             <a:schemeClr val="accent1"/>
           </a:effectRef>
           <a:fontRef idx="minor">
-            <a:schemeClr val="tx1"/>
+            <a:schemeClr val="lt1"/>
           </a:fontRef>
         </p:style>
-      </p:cxnSp>
-      <p:sp>
-        <p:nvSpPr>
-          <p:cNvPr id="8" name="TextBox 7"/>
-          <p:cNvSpPr txBox="1"/>
-          <p:nvPr/>
-        </p:nvSpPr>
-        <p:spPr>
-          <a:xfrm>
-            <a:off x="582015" y="2697480"/>
-            <a:ext cx="3566160" cy="1828800"/>
-          </a:xfrm>
-          <a:prstGeom prst="rect">
-            <a:avLst/>
-          </a:prstGeom>
-          <a:noFill/>
-        </p:spPr>
-        <p:txBody>
-          <a:bodyPr wrap="square" anchor="t" lIns="0" rIns="0" tIns="0" bIns="0">
-            <a:spAutoFit/>
-          </a:bodyPr>
-          <a:lstStyle/>
-          <a:p>
-            <a:pPr algn="l"/>
-            <a:r>
-              <a:rPr sz="7200" b="1" i="0">
-                <a:solidFill>
-                  <a:srgbClr val="F2F2F2"/>
-                </a:solidFill>
-                <a:latin typeface="Helvetica Neue"/>
-              </a:rPr>
-              <a:t>$484 B</a:t>
-            </a:r>
-          </a:p>
-        </p:txBody>
-      </p:sp>
-      <p:sp>
-        <p:nvSpPr>
-          <p:cNvPr id="9" name="TextBox 8"/>
-          <p:cNvSpPr txBox="1"/>
-          <p:nvPr/>
-        </p:nvSpPr>
-        <p:spPr>
-          <a:xfrm>
-            <a:off x="582015" y="4937760"/>
-            <a:ext cx="3566160" cy="548640"/>
-          </a:xfrm>
-          <a:prstGeom prst="rect">
-            <a:avLst/>
-          </a:prstGeom>
-          <a:noFill/>
-        </p:spPr>
-        <p:txBody>
-          <a:bodyPr wrap="square" anchor="t" lIns="0" rIns="0" tIns="0" bIns="0">
-            <a:spAutoFit/>
-          </a:bodyPr>
-          <a:lstStyle/>
-          <a:p>
-            <a:pPr algn="l"/>
-            <a:r>
-              <a:rPr sz="1400" b="0" i="0">
-                <a:solidFill>
-                  <a:srgbClr val="A8A8A8"/>
-                </a:solidFill>
-                <a:latin typeface="Helvetica"/>
-              </a:rPr>
-              <a:t>KNOMAD bilateral matrix, 2021</a:t>
-            </a:r>
-          </a:p>
-        </p:txBody>
-      </p:sp>
-      <p:sp>
-        <p:nvSpPr>
-          <p:cNvPr id="10" name="TextBox 9"/>
-          <p:cNvSpPr txBox="1"/>
-          <p:nvPr/>
-        </p:nvSpPr>
-        <p:spPr>
-          <a:xfrm>
-            <a:off x="4312767" y="2011680"/>
-            <a:ext cx="3566160" cy="365760"/>
-          </a:xfrm>
-          <a:prstGeom prst="rect">
-            <a:avLst/>
-          </a:prstGeom>
-          <a:noFill/>
-        </p:spPr>
-        <p:txBody>
-          <a:bodyPr wrap="square" anchor="t" lIns="0" rIns="0" tIns="0" bIns="0">
-            <a:spAutoFit/>
-          </a:bodyPr>
-          <a:lstStyle/>
-          <a:p>
-            <a:pPr algn="l"/>
-            <a:r>
-              <a:rPr sz="1000" b="0" i="0">
-                <a:solidFill>
-                  <a:srgbClr val="6B6B6B"/>
-                </a:solidFill>
-                <a:latin typeface="Menlo"/>
-              </a:rPr>
-              <a:t>RECOVERABLE</a:t>
-            </a:r>
-          </a:p>
-        </p:txBody>
-      </p:sp>
-      <p:cxnSp>
-        <p:nvCxnSpPr>
-          <p:cNvPr id="11" name="Connector 10"/>
-          <p:cNvCxnSpPr/>
-          <p:nvPr/>
-        </p:nvCxnSpPr>
-        <p:spPr>
-          <a:xfrm>
-            <a:off x="4312767" y="2395728"/>
-            <a:ext cx="3566160" cy="0"/>
-          </a:xfrm>
-          <a:prstGeom prst="line">
-            <a:avLst/>
-          </a:prstGeom>
-          <a:ln w="6350">
-            <a:solidFill>
-              <a:srgbClr val="242424"/>
-            </a:solidFill>
-          </a:ln>
-        </p:spPr>
-        <p:style>
-          <a:lnRef idx="2">
-            <a:schemeClr val="accent1"/>
-          </a:lnRef>
-          <a:fillRef idx="0">
-            <a:schemeClr val="accent1"/>
-          </a:fillRef>
-          <a:effectRef idx="1">
-            <a:schemeClr val="accent1"/>
-          </a:effectRef>
-          <a:fontRef idx="minor">
-            <a:schemeClr val="tx1"/>
-          </a:fontRef>
-        </p:style>
-      </p:cxnSp>
-      <p:sp>
-        <p:nvSpPr>
-          <p:cNvPr id="12" name="TextBox 11"/>
-          <p:cNvSpPr txBox="1"/>
-          <p:nvPr/>
-        </p:nvSpPr>
-        <p:spPr>
-          <a:xfrm>
-            <a:off x="4312767" y="2697480"/>
-            <a:ext cx="3566160" cy="1828800"/>
-          </a:xfrm>
-          <a:prstGeom prst="rect">
-            <a:avLst/>
-          </a:prstGeom>
-          <a:noFill/>
-        </p:spPr>
-        <p:txBody>
-          <a:bodyPr wrap="square" anchor="t" lIns="0" rIns="0" tIns="0" bIns="0">
-            <a:spAutoFit/>
-          </a:bodyPr>
-          <a:lstStyle/>
-          <a:p>
-            <a:pPr algn="l"/>
-            <a:r>
-              <a:rPr sz="7200" b="1" i="0">
-                <a:solidFill>
-                  <a:srgbClr val="F2F2F2"/>
-                </a:solidFill>
-                <a:latin typeface="Helvetica Neue"/>
-              </a:rPr>
-              <a:t>$5.22 B</a:t>
-            </a:r>
-          </a:p>
-        </p:txBody>
-      </p:sp>
-      <p:sp>
-        <p:nvSpPr>
-          <p:cNvPr id="13" name="TextBox 12"/>
-          <p:cNvSpPr txBox="1"/>
-          <p:nvPr/>
-        </p:nvSpPr>
-        <p:spPr>
-          <a:xfrm>
-            <a:off x="4312767" y="4937760"/>
-            <a:ext cx="3566160" cy="548640"/>
-          </a:xfrm>
-          <a:prstGeom prst="rect">
-            <a:avLst/>
-          </a:prstGeom>
-          <a:noFill/>
-        </p:spPr>
-        <p:txBody>
-          <a:bodyPr wrap="square" anchor="t" lIns="0" rIns="0" tIns="0" bIns="0">
-            <a:spAutoFit/>
-          </a:bodyPr>
-          <a:lstStyle/>
-          <a:p>
-            <a:pPr algn="l"/>
-            <a:r>
-              <a:rPr sz="1400" b="0" i="0">
-                <a:solidFill>
-                  <a:srgbClr val="A8A8A8"/>
-                </a:solidFill>
-                <a:latin typeface="Helvetica"/>
-              </a:rPr>
-              <a:t>per year on stablecoin rails</a:t>
-            </a:r>
-          </a:p>
-        </p:txBody>
-      </p:sp>
-      <p:sp>
-        <p:nvSpPr>
-          <p:cNvPr id="14" name="TextBox 13"/>
-          <p:cNvSpPr txBox="1"/>
-          <p:nvPr/>
-        </p:nvSpPr>
-        <p:spPr>
-          <a:xfrm>
-            <a:off x="8043519" y="2011680"/>
-            <a:ext cx="3566160" cy="365760"/>
-          </a:xfrm>
-          <a:prstGeom prst="rect">
-            <a:avLst/>
-          </a:prstGeom>
-          <a:noFill/>
-        </p:spPr>
-        <p:txBody>
-          <a:bodyPr wrap="square" anchor="t" lIns="0" rIns="0" tIns="0" bIns="0">
-            <a:spAutoFit/>
-          </a:bodyPr>
-          <a:lstStyle/>
-          <a:p>
-            <a:pPr algn="l"/>
-            <a:r>
-              <a:rPr sz="1000" b="0" i="0">
-                <a:solidFill>
-                  <a:srgbClr val="6B6B6B"/>
-                </a:solidFill>
-                <a:latin typeface="Menlo"/>
-              </a:rPr>
-              <a:t>CORRIDORS BEAT</a:t>
-            </a:r>
-          </a:p>
-        </p:txBody>
-      </p:sp>
-      <p:cxnSp>
-        <p:nvCxnSpPr>
-          <p:cNvPr id="15" name="Connector 14"/>
-          <p:cNvCxnSpPr/>
-          <p:nvPr/>
-        </p:nvCxnSpPr>
-        <p:spPr>
-          <a:xfrm>
-            <a:off x="8043519" y="2395728"/>
-            <a:ext cx="3566160" cy="0"/>
-          </a:xfrm>
-          <a:prstGeom prst="line">
-            <a:avLst/>
-          </a:prstGeom>
-          <a:ln w="6350">
-            <a:solidFill>
-              <a:srgbClr val="242424"/>
-            </a:solidFill>
-          </a:ln>
-        </p:spPr>
-        <p:style>
-          <a:lnRef idx="2">
-            <a:schemeClr val="accent1"/>
-          </a:lnRef>
-          <a:fillRef idx="0">
-            <a:schemeClr val="accent1"/>
-          </a:fillRef>
-          <a:effectRef idx="1">
-            <a:schemeClr val="accent1"/>
-          </a:effectRef>
-          <a:fontRef idx="minor">
-            <a:schemeClr val="tx1"/>
-          </a:fontRef>
-        </p:style>
-      </p:cxnSp>
-      <p:sp>
-        <p:nvSpPr>
-          <p:cNvPr id="16" name="TextBox 15"/>
-          <p:cNvSpPr txBox="1"/>
-          <p:nvPr/>
-        </p:nvSpPr>
-        <p:spPr>
-          <a:xfrm>
-            <a:off x="8043519" y="2697480"/>
-            <a:ext cx="3566160" cy="1828800"/>
-          </a:xfrm>
-          <a:prstGeom prst="rect">
-            <a:avLst/>
-          </a:prstGeom>
-          <a:noFill/>
-        </p:spPr>
-        <p:txBody>
-          <a:bodyPr wrap="square" anchor="t" lIns="0" rIns="0" tIns="0" bIns="0">
-            <a:spAutoFit/>
-          </a:bodyPr>
-          <a:lstStyle/>
-          <a:p>
-            <a:pPr algn="l"/>
-            <a:r>
-              <a:rPr sz="7200" b="1" i="0">
-                <a:solidFill>
-                  <a:srgbClr val="F2F2F2"/>
-                </a:solidFill>
-                <a:latin typeface="Helvetica Neue"/>
-              </a:rPr>
-              <a:t>57 %</a:t>
-            </a:r>
-          </a:p>
-        </p:txBody>
-      </p:sp>
-      <p:sp>
-        <p:nvSpPr>
-          <p:cNvPr id="17" name="TextBox 16"/>
-          <p:cNvSpPr txBox="1"/>
-          <p:nvPr/>
-        </p:nvSpPr>
-        <p:spPr>
-          <a:xfrm>
-            <a:off x="8043519" y="4937760"/>
-            <a:ext cx="3566160" cy="548640"/>
-          </a:xfrm>
-          <a:prstGeom prst="rect">
-            <a:avLst/>
-          </a:prstGeom>
-          <a:noFill/>
-        </p:spPr>
-        <p:txBody>
-          <a:bodyPr wrap="square" anchor="t" lIns="0" rIns="0" tIns="0" bIns="0">
-            <a:spAutoFit/>
-          </a:bodyPr>
-          <a:lstStyle/>
-          <a:p>
-            <a:pPr algn="l"/>
-            <a:r>
-              <a:rPr sz="1400" b="0" i="0">
-                <a:solidFill>
-                  <a:srgbClr val="A8A8A8"/>
-                </a:solidFill>
-                <a:latin typeface="Helvetica"/>
-              </a:rPr>
-              <a:t>stablecoin wins on 200 of 349</a:t>
-            </a:r>
-          </a:p>
-        </p:txBody>
-      </p:sp>
-      <p:sp>
-        <p:nvSpPr>
-          <p:cNvPr id="18" name="TextBox 17"/>
-          <p:cNvSpPr txBox="1"/>
-          <p:nvPr/>
-        </p:nvSpPr>
-        <p:spPr>
-          <a:xfrm>
-            <a:off x="777240" y="6035040"/>
-            <a:ext cx="10972800" cy="365760"/>
-          </a:xfrm>
-          <a:prstGeom prst="rect">
-            <a:avLst/>
-          </a:prstGeom>
-          <a:noFill/>
-        </p:spPr>
-        <p:txBody>
-          <a:bodyPr wrap="square" anchor="t" lIns="0" rIns="0" tIns="0" bIns="0">
-            <a:spAutoFit/>
-          </a:bodyPr>
-          <a:lstStyle/>
-          <a:p>
-            <a:pPr algn="l"/>
-            <a:r>
-              <a:rPr sz="1100" b="0" i="0">
-                <a:solidFill>
-                  <a:srgbClr val="6B6B6B"/>
-                </a:solidFill>
-                <a:latin typeface="Menlo"/>
-              </a:rPr>
-              <a:t>USD 200 send amount  ·  panel through 2025 1Q  ·  conservative stablecoin defaults.</a:t>
-            </a:r>
-          </a:p>
-        </p:txBody>
-      </p:sp>
+        <p:txBody>
+          <a:bodyPr rtlCol="0" anchor="ctr"/>
+          <a:lstStyle/>
+          <a:p>
+            <a:pPr algn="ctr"/>
+          </a:p>
+        </p:txBody>
+      </p:sp>
+      <p:pic>
+        <p:nvPicPr>
+          <p:cNvPr id="9" name="Picture 8" descr="fig05_diaspora_burden.png"/>
+          <p:cNvPicPr>
+            <a:picLocks noChangeAspect="1"/>
+          </p:cNvPicPr>
+          <p:nvPr/>
+        </p:nvPicPr>
+        <p:blipFill>
+          <a:blip r:embed="rId2"/>
+          <a:stretch>
+            <a:fillRect/>
+          </a:stretch>
+        </p:blipFill>
+        <p:spPr>
+          <a:xfrm>
+            <a:off x="1523847" y="2240280"/>
+            <a:ext cx="9144000" cy="3543300"/>
+          </a:xfrm>
+          <a:prstGeom prst="rect">
+            <a:avLst/>
+          </a:prstGeom>
+        </p:spPr>
+      </p:pic>
     </p:spTree>
   </p:cSld>
   <p:clrMapOvr>
@@ -5629,7 +5350,7 @@
                 </a:solidFill>
                 <a:latin typeface="Menlo"/>
               </a:rPr>
-              <a:t>15  ·  LIMITATIONS</a:t>
+              <a:t>15  ·  ROBUSTNESS</a:t>
             </a:r>
           </a:p>
         </p:txBody>
@@ -5664,7 +5385,7 @@
                 </a:solidFill>
                 <a:latin typeface="Menlo"/>
               </a:rPr>
-              <a:t>16 / 17</a:t>
+              <a:t>16 / 18</a:t>
             </a:r>
           </a:p>
         </p:txBody>
@@ -5712,7 +5433,7 @@
         </p:nvSpPr>
         <p:spPr>
           <a:xfrm>
-            <a:off x="777240" y="1371600"/>
+            <a:off x="777240" y="1463040"/>
             <a:ext cx="10515600" cy="822960"/>
           </a:xfrm>
           <a:prstGeom prst="rect">
@@ -5734,7 +5455,7 @@
                 </a:solidFill>
                 <a:latin typeface="Helvetica Neue"/>
               </a:rPr>
-              <a:t>What this can't tell you.</a:t>
+              <a:t>Does the headline survive scrutiny?</a:t>
             </a:r>
           </a:p>
         </p:txBody>
@@ -5747,7 +5468,112 @@
         </p:nvSpPr>
         <p:spPr>
           <a:xfrm>
-            <a:off x="777240" y="2468880"/>
+            <a:off x="777240" y="2331720"/>
+            <a:ext cx="10515600" cy="457200"/>
+          </a:xfrm>
+          <a:prstGeom prst="rect">
+            <a:avLst/>
+          </a:prstGeom>
+          <a:noFill/>
+        </p:spPr>
+        <p:txBody>
+          <a:bodyPr wrap="square" anchor="t" lIns="0" rIns="0" tIns="0" bIns="0">
+            <a:spAutoFit/>
+          </a:bodyPr>
+          <a:lstStyle/>
+          <a:p>
+            <a:pPr algn="l"/>
+            <a:r>
+              <a:rPr sz="1600" b="0" i="0">
+                <a:solidFill>
+                  <a:srgbClr val="A8A8A8"/>
+                </a:solidFill>
+                <a:latin typeface="Helvetica"/>
+              </a:rPr>
+              <a:t>Four checks. Every assumption is exposed on the dashboard.</a:t>
+            </a:r>
+          </a:p>
+        </p:txBody>
+      </p:sp>
+      <p:sp>
+        <p:nvSpPr>
+          <p:cNvPr id="8" name="TextBox 7"/>
+          <p:cNvSpPr txBox="1"/>
+          <p:nvPr/>
+        </p:nvSpPr>
+        <p:spPr>
+          <a:xfrm>
+            <a:off x="777240" y="3154680"/>
+            <a:ext cx="457200" cy="365760"/>
+          </a:xfrm>
+          <a:prstGeom prst="rect">
+            <a:avLst/>
+          </a:prstGeom>
+          <a:noFill/>
+        </p:spPr>
+        <p:txBody>
+          <a:bodyPr wrap="square" anchor="t" lIns="0" rIns="0" tIns="0" bIns="0">
+            <a:spAutoFit/>
+          </a:bodyPr>
+          <a:lstStyle/>
+          <a:p>
+            <a:pPr algn="l"/>
+            <a:r>
+              <a:rPr sz="1100" b="0" i="0">
+                <a:solidFill>
+                  <a:srgbClr val="6B6B6B"/>
+                </a:solidFill>
+                <a:latin typeface="Menlo"/>
+              </a:rPr>
+              <a:t>01</a:t>
+            </a:r>
+          </a:p>
+        </p:txBody>
+      </p:sp>
+      <p:sp>
+        <p:nvSpPr>
+          <p:cNvPr id="9" name="TextBox 8"/>
+          <p:cNvSpPr txBox="1"/>
+          <p:nvPr/>
+        </p:nvSpPr>
+        <p:spPr>
+          <a:xfrm>
+            <a:off x="1280160" y="3154680"/>
+            <a:ext cx="3200400" cy="365760"/>
+          </a:xfrm>
+          <a:prstGeom prst="rect">
+            <a:avLst/>
+          </a:prstGeom>
+          <a:noFill/>
+        </p:spPr>
+        <p:txBody>
+          <a:bodyPr wrap="square" anchor="t" lIns="0" rIns="0" tIns="0" bIns="0">
+            <a:spAutoFit/>
+          </a:bodyPr>
+          <a:lstStyle/>
+          <a:p>
+            <a:pPr algn="l"/>
+            <a:r>
+              <a:rPr sz="1300" b="1" i="0">
+                <a:solidFill>
+                  <a:srgbClr val="F2F2F2"/>
+                </a:solidFill>
+                <a:latin typeface="Menlo"/>
+              </a:rPr>
+              <a:t>κ SENSITIVITY</a:t>
+            </a:r>
+          </a:p>
+        </p:txBody>
+      </p:sp>
+      <p:sp>
+        <p:nvSpPr>
+          <p:cNvPr id="10" name="TextBox 9"/>
+          <p:cNvSpPr txBox="1"/>
+          <p:nvPr/>
+        </p:nvSpPr>
+        <p:spPr>
+          <a:xfrm>
+            <a:off x="1280160" y="3447288"/>
             <a:ext cx="10058400" cy="365760"/>
           </a:xfrm>
           <a:prstGeom prst="rect">
@@ -5763,26 +5589,201 @@
           <a:p>
             <a:pPr algn="l"/>
             <a:r>
-              <a:rPr sz="1500" b="1" i="0">
+              <a:rPr sz="1300" b="0" i="0">
+                <a:solidFill>
+                  <a:srgbClr val="A8A8A8"/>
+                </a:solidFill>
+                <a:latin typeface="Helvetica"/>
+              </a:rPr>
+              <a:t>Reviewer-supplied κ ∈ [0.05, 0.20]  ·  corridor ranking is largely invariant in the plausible range.</a:t>
+            </a:r>
+          </a:p>
+        </p:txBody>
+      </p:sp>
+      <p:sp>
+        <p:nvSpPr>
+          <p:cNvPr id="11" name="TextBox 10"/>
+          <p:cNvSpPr txBox="1"/>
+          <p:nvPr/>
+        </p:nvSpPr>
+        <p:spPr>
+          <a:xfrm>
+            <a:off x="777240" y="3867912"/>
+            <a:ext cx="457200" cy="365760"/>
+          </a:xfrm>
+          <a:prstGeom prst="rect">
+            <a:avLst/>
+          </a:prstGeom>
+          <a:noFill/>
+        </p:spPr>
+        <p:txBody>
+          <a:bodyPr wrap="square" anchor="t" lIns="0" rIns="0" tIns="0" bIns="0">
+            <a:spAutoFit/>
+          </a:bodyPr>
+          <a:lstStyle/>
+          <a:p>
+            <a:pPr algn="l"/>
+            <a:r>
+              <a:rPr sz="1100" b="0" i="0">
+                <a:solidFill>
+                  <a:srgbClr val="6B6B6B"/>
+                </a:solidFill>
+                <a:latin typeface="Menlo"/>
+              </a:rPr>
+              <a:t>02</a:t>
+            </a:r>
+          </a:p>
+        </p:txBody>
+      </p:sp>
+      <p:sp>
+        <p:nvSpPr>
+          <p:cNvPr id="12" name="TextBox 11"/>
+          <p:cNvSpPr txBox="1"/>
+          <p:nvPr/>
+        </p:nvSpPr>
+        <p:spPr>
+          <a:xfrm>
+            <a:off x="1280160" y="3867912"/>
+            <a:ext cx="3200400" cy="365760"/>
+          </a:xfrm>
+          <a:prstGeom prst="rect">
+            <a:avLst/>
+          </a:prstGeom>
+          <a:noFill/>
+        </p:spPr>
+        <p:txBody>
+          <a:bodyPr wrap="square" anchor="t" lIns="0" rIns="0" tIns="0" bIns="0">
+            <a:spAutoFit/>
+          </a:bodyPr>
+          <a:lstStyle/>
+          <a:p>
+            <a:pPr algn="l"/>
+            <a:r>
+              <a:rPr sz="1300" b="1" i="0">
                 <a:solidFill>
                   <a:srgbClr val="F2F2F2"/>
                 </a:solidFill>
+                <a:latin typeface="Menlo"/>
+              </a:rPr>
+              <a:t>PROVIDER STRESS TEST</a:t>
+            </a:r>
+          </a:p>
+        </p:txBody>
+      </p:sp>
+      <p:sp>
+        <p:nvSpPr>
+          <p:cNvPr id="13" name="TextBox 12"/>
+          <p:cNvSpPr txBox="1"/>
+          <p:nvPr/>
+        </p:nvSpPr>
+        <p:spPr>
+          <a:xfrm>
+            <a:off x="1280160" y="4160520"/>
+            <a:ext cx="10058400" cy="365760"/>
+          </a:xfrm>
+          <a:prstGeom prst="rect">
+            <a:avLst/>
+          </a:prstGeom>
+          <a:noFill/>
+        </p:spPr>
+        <p:txBody>
+          <a:bodyPr wrap="square" anchor="t" lIns="0" rIns="0" tIns="0" bIns="0">
+            <a:spAutoFit/>
+          </a:bodyPr>
+          <a:lstStyle/>
+          <a:p>
+            <a:pPr algn="l"/>
+            <a:r>
+              <a:rPr sz="1300" b="0" i="0">
+                <a:solidFill>
+                  <a:srgbClr val="A8A8A8"/>
+                </a:solidFill>
                 <a:latin typeface="Helvetica"/>
               </a:rPr>
-              <a:t>Provider weighting is uniform.</a:t>
-            </a:r>
-          </a:p>
-        </p:txBody>
-      </p:sp>
-      <p:sp>
-        <p:nvSpPr>
-          <p:cNvPr id="8" name="TextBox 7"/>
-          <p:cNvSpPr txBox="1"/>
-          <p:nvPr/>
-        </p:nvSpPr>
-        <p:spPr>
-          <a:xfrm>
-            <a:off x="777240" y="2761488"/>
+              <a:t>Drop top + bottom 5 % of provider observations per corridor  ·  global savings move by &lt; 3 %.</a:t>
+            </a:r>
+          </a:p>
+        </p:txBody>
+      </p:sp>
+      <p:sp>
+        <p:nvSpPr>
+          <p:cNvPr id="14" name="TextBox 13"/>
+          <p:cNvSpPr txBox="1"/>
+          <p:nvPr/>
+        </p:nvSpPr>
+        <p:spPr>
+          <a:xfrm>
+            <a:off x="777240" y="4581144"/>
+            <a:ext cx="457200" cy="365760"/>
+          </a:xfrm>
+          <a:prstGeom prst="rect">
+            <a:avLst/>
+          </a:prstGeom>
+          <a:noFill/>
+        </p:spPr>
+        <p:txBody>
+          <a:bodyPr wrap="square" anchor="t" lIns="0" rIns="0" tIns="0" bIns="0">
+            <a:spAutoFit/>
+          </a:bodyPr>
+          <a:lstStyle/>
+          <a:p>
+            <a:pPr algn="l"/>
+            <a:r>
+              <a:rPr sz="1100" b="0" i="0">
+                <a:solidFill>
+                  <a:srgbClr val="6B6B6B"/>
+                </a:solidFill>
+                <a:latin typeface="Menlo"/>
+              </a:rPr>
+              <a:t>03</a:t>
+            </a:r>
+          </a:p>
+        </p:txBody>
+      </p:sp>
+      <p:sp>
+        <p:nvSpPr>
+          <p:cNvPr id="15" name="TextBox 14"/>
+          <p:cNvSpPr txBox="1"/>
+          <p:nvPr/>
+        </p:nvSpPr>
+        <p:spPr>
+          <a:xfrm>
+            <a:off x="1280160" y="4581144"/>
+            <a:ext cx="3200400" cy="365760"/>
+          </a:xfrm>
+          <a:prstGeom prst="rect">
+            <a:avLst/>
+          </a:prstGeom>
+          <a:noFill/>
+        </p:spPr>
+        <p:txBody>
+          <a:bodyPr wrap="square" anchor="t" lIns="0" rIns="0" tIns="0" bIns="0">
+            <a:spAutoFit/>
+          </a:bodyPr>
+          <a:lstStyle/>
+          <a:p>
+            <a:pPr algn="l"/>
+            <a:r>
+              <a:rPr sz="1300" b="1" i="0">
+                <a:solidFill>
+                  <a:srgbClr val="F2F2F2"/>
+                </a:solidFill>
+                <a:latin typeface="Menlo"/>
+              </a:rPr>
+              <a:t>AGGREGATION CHOICE</a:t>
+            </a:r>
+          </a:p>
+        </p:txBody>
+      </p:sp>
+      <p:sp>
+        <p:nvSpPr>
+          <p:cNvPr id="16" name="TextBox 15"/>
+          <p:cNvSpPr txBox="1"/>
+          <p:nvPr/>
+        </p:nvSpPr>
+        <p:spPr>
+          <a:xfrm>
+            <a:off x="1280160" y="4873752"/>
             <a:ext cx="10058400" cy="365760"/>
           </a:xfrm>
           <a:prstGeom prst="rect">
@@ -5804,20 +5805,90 @@
                 </a:solidFill>
                 <a:latin typeface="Helvetica"/>
               </a:rPr>
-              <a:t>RPW does not publish market shares. A bank counts as much as a fintech.</a:t>
-            </a:r>
-          </a:p>
-        </p:txBody>
-      </p:sp>
-      <p:sp>
-        <p:nvSpPr>
-          <p:cNvPr id="9" name="TextBox 8"/>
-          <p:cNvSpPr txBox="1"/>
-          <p:nvPr/>
-        </p:nvSpPr>
-        <p:spPr>
-          <a:xfrm>
-            <a:off x="777240" y="3182112"/>
+              <a:t>Mean and median TCI reported alongside  ·  divergence &lt; 0.5 pp on 80 % of corridors.</a:t>
+            </a:r>
+          </a:p>
+        </p:txBody>
+      </p:sp>
+      <p:sp>
+        <p:nvSpPr>
+          <p:cNvPr id="17" name="TextBox 16"/>
+          <p:cNvSpPr txBox="1"/>
+          <p:nvPr/>
+        </p:nvSpPr>
+        <p:spPr>
+          <a:xfrm>
+            <a:off x="777240" y="5294376"/>
+            <a:ext cx="457200" cy="365760"/>
+          </a:xfrm>
+          <a:prstGeom prst="rect">
+            <a:avLst/>
+          </a:prstGeom>
+          <a:noFill/>
+        </p:spPr>
+        <p:txBody>
+          <a:bodyPr wrap="square" anchor="t" lIns="0" rIns="0" tIns="0" bIns="0">
+            <a:spAutoFit/>
+          </a:bodyPr>
+          <a:lstStyle/>
+          <a:p>
+            <a:pPr algn="l"/>
+            <a:r>
+              <a:rPr sz="1100" b="0" i="0">
+                <a:solidFill>
+                  <a:srgbClr val="6B6B6B"/>
+                </a:solidFill>
+                <a:latin typeface="Menlo"/>
+              </a:rPr>
+              <a:t>04</a:t>
+            </a:r>
+          </a:p>
+        </p:txBody>
+      </p:sp>
+      <p:sp>
+        <p:nvSpPr>
+          <p:cNvPr id="18" name="TextBox 17"/>
+          <p:cNvSpPr txBox="1"/>
+          <p:nvPr/>
+        </p:nvSpPr>
+        <p:spPr>
+          <a:xfrm>
+            <a:off x="1280160" y="5294376"/>
+            <a:ext cx="3200400" cy="365760"/>
+          </a:xfrm>
+          <a:prstGeom prst="rect">
+            <a:avLst/>
+          </a:prstGeom>
+          <a:noFill/>
+        </p:spPr>
+        <p:txBody>
+          <a:bodyPr wrap="square" anchor="t" lIns="0" rIns="0" tIns="0" bIns="0">
+            <a:spAutoFit/>
+          </a:bodyPr>
+          <a:lstStyle/>
+          <a:p>
+            <a:pPr algn="l"/>
+            <a:r>
+              <a:rPr sz="1300" b="1" i="0">
+                <a:solidFill>
+                  <a:srgbClr val="F2F2F2"/>
+                </a:solidFill>
+                <a:latin typeface="Menlo"/>
+              </a:rPr>
+              <a:t>ASSUMPTION FLEX</a:t>
+            </a:r>
+          </a:p>
+        </p:txBody>
+      </p:sp>
+      <p:sp>
+        <p:nvSpPr>
+          <p:cNvPr id="19" name="TextBox 18"/>
+          <p:cNvSpPr txBox="1"/>
+          <p:nvPr/>
+        </p:nvSpPr>
+        <p:spPr>
+          <a:xfrm>
+            <a:off x="1280160" y="5586984"/>
             <a:ext cx="10058400" cy="365760"/>
           </a:xfrm>
           <a:prstGeom prst="rect">
@@ -5833,258 +5904,13 @@
           <a:p>
             <a:pPr algn="l"/>
             <a:r>
-              <a:rPr sz="1500" b="1" i="0">
-                <a:solidFill>
-                  <a:srgbClr val="F2F2F2"/>
+              <a:rPr sz="1300" b="0" i="0">
+                <a:solidFill>
+                  <a:srgbClr val="A8A8A8"/>
                 </a:solidFill>
                 <a:latin typeface="Helvetica"/>
               </a:rPr>
-              <a:t>κ is calibrated, not measured.</a:t>
-            </a:r>
-          </a:p>
-        </p:txBody>
-      </p:sp>
-      <p:sp>
-        <p:nvSpPr>
-          <p:cNvPr id="10" name="TextBox 9"/>
-          <p:cNvSpPr txBox="1"/>
-          <p:nvPr/>
-        </p:nvSpPr>
-        <p:spPr>
-          <a:xfrm>
-            <a:off x="777240" y="3474720"/>
-            <a:ext cx="10058400" cy="365760"/>
-          </a:xfrm>
-          <a:prstGeom prst="rect">
-            <a:avLst/>
-          </a:prstGeom>
-          <a:noFill/>
-        </p:spPr>
-        <p:txBody>
-          <a:bodyPr wrap="square" anchor="t" lIns="0" rIns="0" tIns="0" bIns="0">
-            <a:spAutoFit/>
-          </a:bodyPr>
-          <a:lstStyle/>
-          <a:p>
-            <a:pPr algn="l"/>
-            <a:r>
-              <a:rPr sz="1300" b="0" i="0">
-                <a:solidFill>
-                  <a:srgbClr val="A8A8A8"/>
-                </a:solidFill>
-                <a:latin typeface="Helvetica"/>
-              </a:rPr>
-              <a:t>Defensible at 0.10 % / day, but the slider on the dashboard exists for a reason.</a:t>
-            </a:r>
-          </a:p>
-        </p:txBody>
-      </p:sp>
-      <p:sp>
-        <p:nvSpPr>
-          <p:cNvPr id="11" name="TextBox 10"/>
-          <p:cNvSpPr txBox="1"/>
-          <p:nvPr/>
-        </p:nvSpPr>
-        <p:spPr>
-          <a:xfrm>
-            <a:off x="777240" y="3895344"/>
-            <a:ext cx="10058400" cy="365760"/>
-          </a:xfrm>
-          <a:prstGeom prst="rect">
-            <a:avLst/>
-          </a:prstGeom>
-          <a:noFill/>
-        </p:spPr>
-        <p:txBody>
-          <a:bodyPr wrap="square" anchor="t" lIns="0" rIns="0" tIns="0" bIns="0">
-            <a:spAutoFit/>
-          </a:bodyPr>
-          <a:lstStyle/>
-          <a:p>
-            <a:pPr algn="l"/>
-            <a:r>
-              <a:rPr sz="1500" b="1" i="0">
-                <a:solidFill>
-                  <a:srgbClr val="F2F2F2"/>
-                </a:solidFill>
-                <a:latin typeface="Helvetica"/>
-              </a:rPr>
-              <a:t>Stablecoin off-ramp is a floor.</a:t>
-            </a:r>
-          </a:p>
-        </p:txBody>
-      </p:sp>
-      <p:sp>
-        <p:nvSpPr>
-          <p:cNvPr id="12" name="TextBox 11"/>
-          <p:cNvSpPr txBox="1"/>
-          <p:nvPr/>
-        </p:nvSpPr>
-        <p:spPr>
-          <a:xfrm>
-            <a:off x="777240" y="4187952"/>
-            <a:ext cx="10058400" cy="365760"/>
-          </a:xfrm>
-          <a:prstGeom prst="rect">
-            <a:avLst/>
-          </a:prstGeom>
-          <a:noFill/>
-        </p:spPr>
-        <p:txBody>
-          <a:bodyPr wrap="square" anchor="t" lIns="0" rIns="0" tIns="0" bIns="0">
-            <a:spAutoFit/>
-          </a:bodyPr>
-          <a:lstStyle/>
-          <a:p>
-            <a:pPr algn="l"/>
-            <a:r>
-              <a:rPr sz="1300" b="0" i="0">
-                <a:solidFill>
-                  <a:srgbClr val="A8A8A8"/>
-                </a:solidFill>
-                <a:latin typeface="Helvetica"/>
-              </a:rPr>
-              <a:t>KYC delays, P2P trade risk, and de-risking are not in the cost number.</a:t>
-            </a:r>
-          </a:p>
-        </p:txBody>
-      </p:sp>
-      <p:sp>
-        <p:nvSpPr>
-          <p:cNvPr id="13" name="TextBox 12"/>
-          <p:cNvSpPr txBox="1"/>
-          <p:nvPr/>
-        </p:nvSpPr>
-        <p:spPr>
-          <a:xfrm>
-            <a:off x="777240" y="4608576"/>
-            <a:ext cx="10058400" cy="365760"/>
-          </a:xfrm>
-          <a:prstGeom prst="rect">
-            <a:avLst/>
-          </a:prstGeom>
-          <a:noFill/>
-        </p:spPr>
-        <p:txBody>
-          <a:bodyPr wrap="square" anchor="t" lIns="0" rIns="0" tIns="0" bIns="0">
-            <a:spAutoFit/>
-          </a:bodyPr>
-          <a:lstStyle/>
-          <a:p>
-            <a:pPr algn="l"/>
-            <a:r>
-              <a:rPr sz="1500" b="1" i="0">
-                <a:solidFill>
-                  <a:srgbClr val="F2F2F2"/>
-                </a:solidFill>
-                <a:latin typeface="Helvetica"/>
-              </a:rPr>
-              <a:t>BRM volumes are 2021.</a:t>
-            </a:r>
-          </a:p>
-        </p:txBody>
-      </p:sp>
-      <p:sp>
-        <p:nvSpPr>
-          <p:cNvPr id="14" name="TextBox 13"/>
-          <p:cNvSpPr txBox="1"/>
-          <p:nvPr/>
-        </p:nvSpPr>
-        <p:spPr>
-          <a:xfrm>
-            <a:off x="777240" y="4901184"/>
-            <a:ext cx="10058400" cy="365760"/>
-          </a:xfrm>
-          <a:prstGeom prst="rect">
-            <a:avLst/>
-          </a:prstGeom>
-          <a:noFill/>
-        </p:spPr>
-        <p:txBody>
-          <a:bodyPr wrap="square" anchor="t" lIns="0" rIns="0" tIns="0" bIns="0">
-            <a:spAutoFit/>
-          </a:bodyPr>
-          <a:lstStyle/>
-          <a:p>
-            <a:pPr algn="l"/>
-            <a:r>
-              <a:rPr sz="1300" b="0" i="0">
-                <a:solidFill>
-                  <a:srgbClr val="A8A8A8"/>
-                </a:solidFill>
-                <a:latin typeface="Helvetica"/>
-              </a:rPr>
-              <a:t>Latest published. Headline USD figure is anchored to that year.</a:t>
-            </a:r>
-          </a:p>
-        </p:txBody>
-      </p:sp>
-      <p:sp>
-        <p:nvSpPr>
-          <p:cNvPr id="15" name="TextBox 14"/>
-          <p:cNvSpPr txBox="1"/>
-          <p:nvPr/>
-        </p:nvSpPr>
-        <p:spPr>
-          <a:xfrm>
-            <a:off x="777240" y="5321808"/>
-            <a:ext cx="10058400" cy="365760"/>
-          </a:xfrm>
-          <a:prstGeom prst="rect">
-            <a:avLst/>
-          </a:prstGeom>
-          <a:noFill/>
-        </p:spPr>
-        <p:txBody>
-          <a:bodyPr wrap="square" anchor="t" lIns="0" rIns="0" tIns="0" bIns="0">
-            <a:spAutoFit/>
-          </a:bodyPr>
-          <a:lstStyle/>
-          <a:p>
-            <a:pPr algn="l"/>
-            <a:r>
-              <a:rPr sz="1500" b="1" i="0">
-                <a:solidFill>
-                  <a:srgbClr val="F2F2F2"/>
-                </a:solidFill>
-                <a:latin typeface="Helvetica"/>
-              </a:rPr>
-              <a:t>No causal claim.</a:t>
-            </a:r>
-          </a:p>
-        </p:txBody>
-      </p:sp>
-      <p:sp>
-        <p:nvSpPr>
-          <p:cNvPr id="16" name="TextBox 15"/>
-          <p:cNvSpPr txBox="1"/>
-          <p:nvPr/>
-        </p:nvSpPr>
-        <p:spPr>
-          <a:xfrm>
-            <a:off x="777240" y="5614416"/>
-            <a:ext cx="10058400" cy="365760"/>
-          </a:xfrm>
-          <a:prstGeom prst="rect">
-            <a:avLst/>
-          </a:prstGeom>
-          <a:noFill/>
-        </p:spPr>
-        <p:txBody>
-          <a:bodyPr wrap="square" anchor="t" lIns="0" rIns="0" tIns="0" bIns="0">
-            <a:spAutoFit/>
-          </a:bodyPr>
-          <a:lstStyle/>
-          <a:p>
-            <a:pPr algn="l"/>
-            <a:r>
-              <a:rPr sz="1300" b="0" i="0">
-                <a:solidFill>
-                  <a:srgbClr val="A8A8A8"/>
-                </a:solidFill>
-                <a:latin typeface="Helvetica"/>
-              </a:rPr>
-              <a:t>Operator-class effect after FE; selection into firm type is endogenous.</a:t>
+              <a:t>Optimistic stablecoin defaults reach the $30 – 50 B / yr ballpark cited by BIS Bulletin 87.</a:t>
             </a:r>
           </a:p>
         </p:txBody>
@@ -6180,7 +6006,7 @@
                 </a:solidFill>
                 <a:latin typeface="Menlo"/>
               </a:rPr>
-              <a:t>16  ·  DEMO  ·  Q&amp;A</a:t>
+              <a:t>16  ·  LIMITATIONS</a:t>
             </a:r>
           </a:p>
         </p:txBody>
@@ -6215,7 +6041,558 @@
                 </a:solidFill>
                 <a:latin typeface="Menlo"/>
               </a:rPr>
-              <a:t>17 / 17</a:t>
+              <a:t>17 / 18</a:t>
+            </a:r>
+          </a:p>
+        </p:txBody>
+      </p:sp>
+      <p:cxnSp>
+        <p:nvCxnSpPr>
+          <p:cNvPr id="5" name="Connector 4"/>
+          <p:cNvCxnSpPr/>
+          <p:nvPr/>
+        </p:nvCxnSpPr>
+        <p:spPr>
+          <a:xfrm>
+            <a:off x="777240" y="868680"/>
+            <a:ext cx="10652760" cy="0"/>
+          </a:xfrm>
+          <a:prstGeom prst="line">
+            <a:avLst/>
+          </a:prstGeom>
+          <a:ln w="7620">
+            <a:solidFill>
+              <a:srgbClr val="242424"/>
+            </a:solidFill>
+          </a:ln>
+        </p:spPr>
+        <p:style>
+          <a:lnRef idx="2">
+            <a:schemeClr val="accent1"/>
+          </a:lnRef>
+          <a:fillRef idx="0">
+            <a:schemeClr val="accent1"/>
+          </a:fillRef>
+          <a:effectRef idx="1">
+            <a:schemeClr val="accent1"/>
+          </a:effectRef>
+          <a:fontRef idx="minor">
+            <a:schemeClr val="tx1"/>
+          </a:fontRef>
+        </p:style>
+      </p:cxnSp>
+      <p:sp>
+        <p:nvSpPr>
+          <p:cNvPr id="6" name="TextBox 5"/>
+          <p:cNvSpPr txBox="1"/>
+          <p:nvPr/>
+        </p:nvSpPr>
+        <p:spPr>
+          <a:xfrm>
+            <a:off x="777240" y="1371600"/>
+            <a:ext cx="10515600" cy="822960"/>
+          </a:xfrm>
+          <a:prstGeom prst="rect">
+            <a:avLst/>
+          </a:prstGeom>
+          <a:noFill/>
+        </p:spPr>
+        <p:txBody>
+          <a:bodyPr wrap="square" anchor="t" lIns="0" rIns="0" tIns="0" bIns="0">
+            <a:spAutoFit/>
+          </a:bodyPr>
+          <a:lstStyle/>
+          <a:p>
+            <a:pPr algn="l"/>
+            <a:r>
+              <a:rPr sz="4000" b="1" i="0">
+                <a:solidFill>
+                  <a:srgbClr val="F2F2F2"/>
+                </a:solidFill>
+                <a:latin typeface="Helvetica Neue"/>
+              </a:rPr>
+              <a:t>What this can't tell you.</a:t>
+            </a:r>
+          </a:p>
+        </p:txBody>
+      </p:sp>
+      <p:sp>
+        <p:nvSpPr>
+          <p:cNvPr id="7" name="TextBox 6"/>
+          <p:cNvSpPr txBox="1"/>
+          <p:nvPr/>
+        </p:nvSpPr>
+        <p:spPr>
+          <a:xfrm>
+            <a:off x="777240" y="2468880"/>
+            <a:ext cx="10058400" cy="365760"/>
+          </a:xfrm>
+          <a:prstGeom prst="rect">
+            <a:avLst/>
+          </a:prstGeom>
+          <a:noFill/>
+        </p:spPr>
+        <p:txBody>
+          <a:bodyPr wrap="square" anchor="t" lIns="0" rIns="0" tIns="0" bIns="0">
+            <a:spAutoFit/>
+          </a:bodyPr>
+          <a:lstStyle/>
+          <a:p>
+            <a:pPr algn="l"/>
+            <a:r>
+              <a:rPr sz="1500" b="1" i="0">
+                <a:solidFill>
+                  <a:srgbClr val="F2F2F2"/>
+                </a:solidFill>
+                <a:latin typeface="Helvetica"/>
+              </a:rPr>
+              <a:t>Provider weighting is uniform.</a:t>
+            </a:r>
+          </a:p>
+        </p:txBody>
+      </p:sp>
+      <p:sp>
+        <p:nvSpPr>
+          <p:cNvPr id="8" name="TextBox 7"/>
+          <p:cNvSpPr txBox="1"/>
+          <p:nvPr/>
+        </p:nvSpPr>
+        <p:spPr>
+          <a:xfrm>
+            <a:off x="777240" y="2761488"/>
+            <a:ext cx="10058400" cy="365760"/>
+          </a:xfrm>
+          <a:prstGeom prst="rect">
+            <a:avLst/>
+          </a:prstGeom>
+          <a:noFill/>
+        </p:spPr>
+        <p:txBody>
+          <a:bodyPr wrap="square" anchor="t" lIns="0" rIns="0" tIns="0" bIns="0">
+            <a:spAutoFit/>
+          </a:bodyPr>
+          <a:lstStyle/>
+          <a:p>
+            <a:pPr algn="l"/>
+            <a:r>
+              <a:rPr sz="1300" b="0" i="0">
+                <a:solidFill>
+                  <a:srgbClr val="A8A8A8"/>
+                </a:solidFill>
+                <a:latin typeface="Helvetica"/>
+              </a:rPr>
+              <a:t>RPW does not publish market shares. A bank counts as much as a fintech.</a:t>
+            </a:r>
+          </a:p>
+        </p:txBody>
+      </p:sp>
+      <p:sp>
+        <p:nvSpPr>
+          <p:cNvPr id="9" name="TextBox 8"/>
+          <p:cNvSpPr txBox="1"/>
+          <p:nvPr/>
+        </p:nvSpPr>
+        <p:spPr>
+          <a:xfrm>
+            <a:off x="777240" y="3182112"/>
+            <a:ext cx="10058400" cy="365760"/>
+          </a:xfrm>
+          <a:prstGeom prst="rect">
+            <a:avLst/>
+          </a:prstGeom>
+          <a:noFill/>
+        </p:spPr>
+        <p:txBody>
+          <a:bodyPr wrap="square" anchor="t" lIns="0" rIns="0" tIns="0" bIns="0">
+            <a:spAutoFit/>
+          </a:bodyPr>
+          <a:lstStyle/>
+          <a:p>
+            <a:pPr algn="l"/>
+            <a:r>
+              <a:rPr sz="1500" b="1" i="0">
+                <a:solidFill>
+                  <a:srgbClr val="F2F2F2"/>
+                </a:solidFill>
+                <a:latin typeface="Helvetica"/>
+              </a:rPr>
+              <a:t>κ is calibrated, not measured.</a:t>
+            </a:r>
+          </a:p>
+        </p:txBody>
+      </p:sp>
+      <p:sp>
+        <p:nvSpPr>
+          <p:cNvPr id="10" name="TextBox 9"/>
+          <p:cNvSpPr txBox="1"/>
+          <p:nvPr/>
+        </p:nvSpPr>
+        <p:spPr>
+          <a:xfrm>
+            <a:off x="777240" y="3474720"/>
+            <a:ext cx="10058400" cy="365760"/>
+          </a:xfrm>
+          <a:prstGeom prst="rect">
+            <a:avLst/>
+          </a:prstGeom>
+          <a:noFill/>
+        </p:spPr>
+        <p:txBody>
+          <a:bodyPr wrap="square" anchor="t" lIns="0" rIns="0" tIns="0" bIns="0">
+            <a:spAutoFit/>
+          </a:bodyPr>
+          <a:lstStyle/>
+          <a:p>
+            <a:pPr algn="l"/>
+            <a:r>
+              <a:rPr sz="1300" b="0" i="0">
+                <a:solidFill>
+                  <a:srgbClr val="A8A8A8"/>
+                </a:solidFill>
+                <a:latin typeface="Helvetica"/>
+              </a:rPr>
+              <a:t>Defensible at 0.10 % / day, but the slider on the dashboard exists for a reason.</a:t>
+            </a:r>
+          </a:p>
+        </p:txBody>
+      </p:sp>
+      <p:sp>
+        <p:nvSpPr>
+          <p:cNvPr id="11" name="TextBox 10"/>
+          <p:cNvSpPr txBox="1"/>
+          <p:nvPr/>
+        </p:nvSpPr>
+        <p:spPr>
+          <a:xfrm>
+            <a:off x="777240" y="3895344"/>
+            <a:ext cx="10058400" cy="365760"/>
+          </a:xfrm>
+          <a:prstGeom prst="rect">
+            <a:avLst/>
+          </a:prstGeom>
+          <a:noFill/>
+        </p:spPr>
+        <p:txBody>
+          <a:bodyPr wrap="square" anchor="t" lIns="0" rIns="0" tIns="0" bIns="0">
+            <a:spAutoFit/>
+          </a:bodyPr>
+          <a:lstStyle/>
+          <a:p>
+            <a:pPr algn="l"/>
+            <a:r>
+              <a:rPr sz="1500" b="1" i="0">
+                <a:solidFill>
+                  <a:srgbClr val="F2F2F2"/>
+                </a:solidFill>
+                <a:latin typeface="Helvetica"/>
+              </a:rPr>
+              <a:t>Stablecoin off-ramp is a floor.</a:t>
+            </a:r>
+          </a:p>
+        </p:txBody>
+      </p:sp>
+      <p:sp>
+        <p:nvSpPr>
+          <p:cNvPr id="12" name="TextBox 11"/>
+          <p:cNvSpPr txBox="1"/>
+          <p:nvPr/>
+        </p:nvSpPr>
+        <p:spPr>
+          <a:xfrm>
+            <a:off x="777240" y="4187952"/>
+            <a:ext cx="10058400" cy="365760"/>
+          </a:xfrm>
+          <a:prstGeom prst="rect">
+            <a:avLst/>
+          </a:prstGeom>
+          <a:noFill/>
+        </p:spPr>
+        <p:txBody>
+          <a:bodyPr wrap="square" anchor="t" lIns="0" rIns="0" tIns="0" bIns="0">
+            <a:spAutoFit/>
+          </a:bodyPr>
+          <a:lstStyle/>
+          <a:p>
+            <a:pPr algn="l"/>
+            <a:r>
+              <a:rPr sz="1300" b="0" i="0">
+                <a:solidFill>
+                  <a:srgbClr val="A8A8A8"/>
+                </a:solidFill>
+                <a:latin typeface="Helvetica"/>
+              </a:rPr>
+              <a:t>KYC delays, P2P trade risk, and de-risking are not in the cost number.</a:t>
+            </a:r>
+          </a:p>
+        </p:txBody>
+      </p:sp>
+      <p:sp>
+        <p:nvSpPr>
+          <p:cNvPr id="13" name="TextBox 12"/>
+          <p:cNvSpPr txBox="1"/>
+          <p:nvPr/>
+        </p:nvSpPr>
+        <p:spPr>
+          <a:xfrm>
+            <a:off x="777240" y="4608576"/>
+            <a:ext cx="10058400" cy="365760"/>
+          </a:xfrm>
+          <a:prstGeom prst="rect">
+            <a:avLst/>
+          </a:prstGeom>
+          <a:noFill/>
+        </p:spPr>
+        <p:txBody>
+          <a:bodyPr wrap="square" anchor="t" lIns="0" rIns="0" tIns="0" bIns="0">
+            <a:spAutoFit/>
+          </a:bodyPr>
+          <a:lstStyle/>
+          <a:p>
+            <a:pPr algn="l"/>
+            <a:r>
+              <a:rPr sz="1500" b="1" i="0">
+                <a:solidFill>
+                  <a:srgbClr val="F2F2F2"/>
+                </a:solidFill>
+                <a:latin typeface="Helvetica"/>
+              </a:rPr>
+              <a:t>BRM volumes are 2021.</a:t>
+            </a:r>
+          </a:p>
+        </p:txBody>
+      </p:sp>
+      <p:sp>
+        <p:nvSpPr>
+          <p:cNvPr id="14" name="TextBox 13"/>
+          <p:cNvSpPr txBox="1"/>
+          <p:nvPr/>
+        </p:nvSpPr>
+        <p:spPr>
+          <a:xfrm>
+            <a:off x="777240" y="4901184"/>
+            <a:ext cx="10058400" cy="365760"/>
+          </a:xfrm>
+          <a:prstGeom prst="rect">
+            <a:avLst/>
+          </a:prstGeom>
+          <a:noFill/>
+        </p:spPr>
+        <p:txBody>
+          <a:bodyPr wrap="square" anchor="t" lIns="0" rIns="0" tIns="0" bIns="0">
+            <a:spAutoFit/>
+          </a:bodyPr>
+          <a:lstStyle/>
+          <a:p>
+            <a:pPr algn="l"/>
+            <a:r>
+              <a:rPr sz="1300" b="0" i="0">
+                <a:solidFill>
+                  <a:srgbClr val="A8A8A8"/>
+                </a:solidFill>
+                <a:latin typeface="Helvetica"/>
+              </a:rPr>
+              <a:t>Latest published. Headline USD figure is anchored to that year.</a:t>
+            </a:r>
+          </a:p>
+        </p:txBody>
+      </p:sp>
+      <p:sp>
+        <p:nvSpPr>
+          <p:cNvPr id="15" name="TextBox 14"/>
+          <p:cNvSpPr txBox="1"/>
+          <p:nvPr/>
+        </p:nvSpPr>
+        <p:spPr>
+          <a:xfrm>
+            <a:off x="777240" y="5321808"/>
+            <a:ext cx="10058400" cy="365760"/>
+          </a:xfrm>
+          <a:prstGeom prst="rect">
+            <a:avLst/>
+          </a:prstGeom>
+          <a:noFill/>
+        </p:spPr>
+        <p:txBody>
+          <a:bodyPr wrap="square" anchor="t" lIns="0" rIns="0" tIns="0" bIns="0">
+            <a:spAutoFit/>
+          </a:bodyPr>
+          <a:lstStyle/>
+          <a:p>
+            <a:pPr algn="l"/>
+            <a:r>
+              <a:rPr sz="1500" b="1" i="0">
+                <a:solidFill>
+                  <a:srgbClr val="F2F2F2"/>
+                </a:solidFill>
+                <a:latin typeface="Helvetica"/>
+              </a:rPr>
+              <a:t>No causal claim.</a:t>
+            </a:r>
+          </a:p>
+        </p:txBody>
+      </p:sp>
+      <p:sp>
+        <p:nvSpPr>
+          <p:cNvPr id="16" name="TextBox 15"/>
+          <p:cNvSpPr txBox="1"/>
+          <p:nvPr/>
+        </p:nvSpPr>
+        <p:spPr>
+          <a:xfrm>
+            <a:off x="777240" y="5614416"/>
+            <a:ext cx="10058400" cy="365760"/>
+          </a:xfrm>
+          <a:prstGeom prst="rect">
+            <a:avLst/>
+          </a:prstGeom>
+          <a:noFill/>
+        </p:spPr>
+        <p:txBody>
+          <a:bodyPr wrap="square" anchor="t" lIns="0" rIns="0" tIns="0" bIns="0">
+            <a:spAutoFit/>
+          </a:bodyPr>
+          <a:lstStyle/>
+          <a:p>
+            <a:pPr algn="l"/>
+            <a:r>
+              <a:rPr sz="1300" b="0" i="0">
+                <a:solidFill>
+                  <a:srgbClr val="A8A8A8"/>
+                </a:solidFill>
+                <a:latin typeface="Helvetica"/>
+              </a:rPr>
+              <a:t>Operator-class effect after FE; selection into firm type is endogenous.</a:t>
+            </a:r>
+          </a:p>
+        </p:txBody>
+      </p:sp>
+    </p:spTree>
+  </p:cSld>
+  <p:clrMapOvr>
+    <a:masterClrMapping/>
+  </p:clrMapOvr>
+</p:sld>
+</file>
+
+<file path=ppt/slides/slide18.xml><?xml version="1.0" encoding="utf-8"?>
+<p:sld xmlns:a="http://schemas.openxmlformats.org/drawingml/2006/main" xmlns:p="http://schemas.openxmlformats.org/presentationml/2006/main" xmlns:r="http://schemas.openxmlformats.org/officeDocument/2006/relationships">
+  <p:cSld>
+    <p:spTree>
+      <p:nvGrpSpPr>
+        <p:cNvPr id="1" name=""/>
+        <p:cNvGrpSpPr/>
+        <p:nvPr/>
+      </p:nvGrpSpPr>
+      <p:grpSpPr/>
+      <p:sp>
+        <p:nvSpPr>
+          <p:cNvPr id="2" name="Rectangle 1"/>
+          <p:cNvSpPr/>
+          <p:nvPr/>
+        </p:nvSpPr>
+        <p:spPr>
+          <a:xfrm>
+            <a:off x="0" y="0"/>
+            <a:ext cx="12191695" cy="6858000"/>
+          </a:xfrm>
+          <a:prstGeom prst="rect">
+            <a:avLst/>
+          </a:prstGeom>
+          <a:solidFill>
+            <a:srgbClr val="0A0A0A"/>
+          </a:solidFill>
+          <a:ln>
+            <a:noFill/>
+          </a:ln>
+        </p:spPr>
+        <p:style>
+          <a:lnRef idx="1">
+            <a:schemeClr val="accent1"/>
+          </a:lnRef>
+          <a:fillRef idx="3">
+            <a:schemeClr val="accent1"/>
+          </a:fillRef>
+          <a:effectRef idx="2">
+            <a:schemeClr val="accent1"/>
+          </a:effectRef>
+          <a:fontRef idx="minor">
+            <a:schemeClr val="lt1"/>
+          </a:fontRef>
+        </p:style>
+        <p:txBody>
+          <a:bodyPr rtlCol="0" anchor="ctr"/>
+          <a:lstStyle/>
+          <a:p>
+            <a:pPr algn="ctr"/>
+          </a:p>
+        </p:txBody>
+      </p:sp>
+      <p:sp>
+        <p:nvSpPr>
+          <p:cNvPr id="3" name="TextBox 2"/>
+          <p:cNvSpPr txBox="1"/>
+          <p:nvPr/>
+        </p:nvSpPr>
+        <p:spPr>
+          <a:xfrm>
+            <a:off x="777240" y="502920"/>
+            <a:ext cx="9144000" cy="274320"/>
+          </a:xfrm>
+          <a:prstGeom prst="rect">
+            <a:avLst/>
+          </a:prstGeom>
+          <a:noFill/>
+        </p:spPr>
+        <p:txBody>
+          <a:bodyPr wrap="square" anchor="t" lIns="0" rIns="0" tIns="0" bIns="0">
+            <a:spAutoFit/>
+          </a:bodyPr>
+          <a:lstStyle/>
+          <a:p>
+            <a:pPr algn="l"/>
+            <a:r>
+              <a:rPr sz="1000" b="0" i="0">
+                <a:solidFill>
+                  <a:srgbClr val="6B6B6B"/>
+                </a:solidFill>
+                <a:latin typeface="Menlo"/>
+              </a:rPr>
+              <a:t>17  ·  DEMO  ·  Q&amp;A</a:t>
+            </a:r>
+          </a:p>
+        </p:txBody>
+      </p:sp>
+      <p:sp>
+        <p:nvSpPr>
+          <p:cNvPr id="4" name="TextBox 3"/>
+          <p:cNvSpPr txBox="1"/>
+          <p:nvPr/>
+        </p:nvSpPr>
+        <p:spPr>
+          <a:xfrm>
+            <a:off x="10515600" y="502920"/>
+            <a:ext cx="1097280" cy="274320"/>
+          </a:xfrm>
+          <a:prstGeom prst="rect">
+            <a:avLst/>
+          </a:prstGeom>
+          <a:noFill/>
+        </p:spPr>
+        <p:txBody>
+          <a:bodyPr wrap="square" anchor="t" lIns="0" rIns="0" tIns="0" bIns="0">
+            <a:spAutoFit/>
+          </a:bodyPr>
+          <a:lstStyle/>
+          <a:p>
+            <a:pPr algn="r"/>
+            <a:r>
+              <a:rPr sz="1000" b="0" i="0">
+                <a:solidFill>
+                  <a:srgbClr val="6B6B6B"/>
+                </a:solidFill>
+                <a:latin typeface="Menlo"/>
+              </a:rPr>
+              <a:t>18 / 18</a:t>
             </a:r>
           </a:p>
         </p:txBody>
@@ -6486,7 +6863,7 @@
                 </a:solidFill>
                 <a:latin typeface="Menlo"/>
               </a:rPr>
-              <a:t>01  ·  THE HOOK</a:t>
+              <a:t>01  ·  THE QUESTION</a:t>
             </a:r>
           </a:p>
         </p:txBody>
@@ -6521,7 +6898,7 @@
                 </a:solidFill>
                 <a:latin typeface="Menlo"/>
               </a:rPr>
-              <a:t>02 / 17</a:t>
+              <a:t>02 / 18</a:t>
             </a:r>
           </a:p>
         </p:txBody>
@@ -6626,7 +7003,7 @@
                 </a:solidFill>
                 <a:latin typeface="Helvetica"/>
               </a:rPr>
-              <a:t>is what migrants would keep, every year,</a:t>
+              <a:t>What if the world's most expensive remittance corridors</a:t>
             </a:r>
           </a:p>
         </p:txBody>
@@ -6661,7 +7038,7 @@
                 </a:solidFill>
                 <a:latin typeface="Helvetica"/>
               </a:rPr>
-              <a:t>if remittances ran on stablecoin rails.</a:t>
+              <a:t>ran on stablecoin rails? An empirical answer, per corridor.</a:t>
             </a:r>
           </a:p>
         </p:txBody>
@@ -6696,7 +7073,7 @@
                 </a:solidFill>
                 <a:latin typeface="Menlo"/>
               </a:rPr>
-              <a:t>Conservative estimate. 200 of 349 corridors. World Bank panel, 2025 Q1.</a:t>
+              <a:t>World Bank panel, 2016 2Q → 2025 1Q  ·  368 corridors  ·  391,797 observations.</a:t>
             </a:r>
           </a:p>
         </p:txBody>
@@ -6792,7 +7169,7 @@
                 </a:solidFill>
                 <a:latin typeface="Menlo"/>
               </a:rPr>
-              <a:t>02  ·  THE PROBLEM</a:t>
+              <a:t>02  ·  THE GAP</a:t>
             </a:r>
           </a:p>
         </p:txBody>
@@ -6827,7 +7204,7 @@
                 </a:solidFill>
                 <a:latin typeface="Menlo"/>
               </a:rPr>
-              <a:t>03 / 17</a:t>
+              <a:t>03 / 18</a:t>
             </a:r>
           </a:p>
         </p:txBody>
@@ -6897,7 +7274,7 @@
                 </a:solidFill>
                 <a:latin typeface="Helvetica Neue"/>
               </a:rPr>
-              <a:t>The advertised fee is half the story.</a:t>
+              <a:t>Three signals, never combined.</a:t>
             </a:r>
           </a:p>
         </p:txBody>
@@ -6911,7 +7288,7 @@
         <p:spPr>
           <a:xfrm>
             <a:off x="777240" y="2468880"/>
-            <a:ext cx="10058400" cy="1097280"/>
+            <a:ext cx="10058400" cy="1280160"/>
           </a:xfrm>
           <a:prstGeom prst="rect">
             <a:avLst/>
@@ -6926,17 +7303,17 @@
           <a:p>
             <a:pPr algn="l">
               <a:lnSpc>
-                <a:spcPct val="135000"/>
+                <a:spcPct val="140000"/>
               </a:lnSpc>
             </a:pPr>
             <a:r>
-              <a:rPr sz="2000" b="0" i="0">
+              <a:rPr sz="1800" b="0" i="0">
                 <a:solidFill>
                   <a:srgbClr val="A8A8A8"/>
                 </a:solidFill>
                 <a:latin typeface="Helvetica"/>
               </a:rPr>
-              <a:t>Public reports treat fee and FX margin as separate columns. Speed isn't priced at all.</a:t>
+              <a:t>Public reports treat fee and FX margin as separate columns. Speed isn't priced at all. No published metric unifies the three; we engineer one.</a:t>
             </a:r>
           </a:p>
         </p:txBody>
@@ -6949,7 +7326,7 @@
         </p:nvSpPr>
         <p:spPr>
           <a:xfrm>
-            <a:off x="777240" y="3977639"/>
+            <a:off x="777240" y="4206240"/>
             <a:ext cx="3383280" cy="365760"/>
           </a:xfrm>
           <a:prstGeom prst="rect">
@@ -6971,7 +7348,7 @@
                 </a:solidFill>
                 <a:latin typeface="Menlo"/>
               </a:rPr>
-              <a:t>FEE</a:t>
+              <a:t>FEE %</a:t>
             </a:r>
           </a:p>
         </p:txBody>
@@ -6984,7 +7361,7 @@
         </p:nvCxnSpPr>
         <p:spPr>
           <a:xfrm>
-            <a:off x="777240" y="4389119"/>
+            <a:off x="777240" y="4617720"/>
             <a:ext cx="3383280" cy="0"/>
           </a:xfrm>
           <a:prstGeom prst="line">
@@ -7019,7 +7396,7 @@
         </p:nvSpPr>
         <p:spPr>
           <a:xfrm>
-            <a:off x="777240" y="4544567"/>
+            <a:off x="777240" y="4773168"/>
             <a:ext cx="3383280" cy="1828800"/>
           </a:xfrm>
           <a:prstGeom prst="rect">
@@ -7058,7 +7435,7 @@
         </p:nvSpPr>
         <p:spPr>
           <a:xfrm>
-            <a:off x="4480560" y="3977639"/>
+            <a:off x="4480560" y="4206240"/>
             <a:ext cx="3383280" cy="365760"/>
           </a:xfrm>
           <a:prstGeom prst="rect">
@@ -7080,7 +7457,7 @@
                 </a:solidFill>
                 <a:latin typeface="Menlo"/>
               </a:rPr>
-              <a:t>FX MARGIN</a:t>
+              <a:t>FX MARGIN %</a:t>
             </a:r>
           </a:p>
         </p:txBody>
@@ -7093,7 +7470,7 @@
         </p:nvCxnSpPr>
         <p:spPr>
           <a:xfrm>
-            <a:off x="4480560" y="4389119"/>
+            <a:off x="4480560" y="4617720"/>
             <a:ext cx="3383280" cy="0"/>
           </a:xfrm>
           <a:prstGeom prst="line">
@@ -7128,7 +7505,7 @@
         </p:nvSpPr>
         <p:spPr>
           <a:xfrm>
-            <a:off x="4480560" y="4544567"/>
+            <a:off x="4480560" y="4773168"/>
             <a:ext cx="3383280" cy="1828800"/>
           </a:xfrm>
           <a:prstGeom prst="rect">
@@ -7167,7 +7544,7 @@
         </p:nvSpPr>
         <p:spPr>
           <a:xfrm>
-            <a:off x="8183880" y="3977639"/>
+            <a:off x="8183880" y="4206240"/>
             <a:ext cx="3383280" cy="365760"/>
           </a:xfrm>
           <a:prstGeom prst="rect">
@@ -7202,7 +7579,7 @@
         </p:nvCxnSpPr>
         <p:spPr>
           <a:xfrm>
-            <a:off x="8183880" y="4389119"/>
+            <a:off x="8183880" y="4617720"/>
             <a:ext cx="3383280" cy="0"/>
           </a:xfrm>
           <a:prstGeom prst="line">
@@ -7237,7 +7614,7 @@
         </p:nvSpPr>
         <p:spPr>
           <a:xfrm>
-            <a:off x="8183880" y="4544567"/>
+            <a:off x="8183880" y="4773168"/>
             <a:ext cx="3383280" cy="1828800"/>
           </a:xfrm>
           <a:prstGeom prst="rect">
@@ -7394,7 +7771,7 @@
                 </a:solidFill>
                 <a:latin typeface="Menlo"/>
               </a:rPr>
-              <a:t>04 / 17</a:t>
+              <a:t>04 / 18</a:t>
             </a:r>
           </a:p>
         </p:txBody>
@@ -7813,7 +8190,7 @@
                 </a:solidFill>
                 <a:latin typeface="Menlo"/>
               </a:rPr>
-              <a:t>05 / 17</a:t>
+              <a:t>05 / 18</a:t>
             </a:r>
           </a:p>
         </p:txBody>
@@ -8434,7 +8811,7 @@
                 </a:solidFill>
                 <a:latin typeface="Menlo"/>
               </a:rPr>
-              <a:t>05  ·  METHODOLOGY  ·  TRUE COST INDEX</a:t>
+              <a:t>05  ·  PIPELINE</a:t>
             </a:r>
           </a:p>
         </p:txBody>
@@ -8469,7 +8846,7 @@
                 </a:solidFill>
                 <a:latin typeface="Menlo"/>
               </a:rPr>
-              <a:t>06 / 17</a:t>
+              <a:t>06 / 18</a:t>
             </a:r>
           </a:p>
         </p:txBody>
@@ -8533,13 +8910,13 @@
           <a:p>
             <a:pPr algn="l"/>
             <a:r>
-              <a:rPr sz="4400" b="1" i="0">
+              <a:rPr sz="5200" b="1" i="0">
                 <a:solidFill>
                   <a:srgbClr val="F2F2F2"/>
                 </a:solidFill>
                 <a:latin typeface="Helvetica Neue"/>
               </a:rPr>
-              <a:t>True Cost Index.</a:t>
+              <a:t>Pipeline.</a:t>
             </a:r>
           </a:p>
         </p:txBody>
@@ -8552,42 +8929,882 @@
         </p:nvSpPr>
         <p:spPr>
           <a:xfrm>
-            <a:off x="777240" y="2743200"/>
-            <a:ext cx="10972800" cy="1097280"/>
-          </a:xfrm>
-          <a:prstGeom prst="rect">
-            <a:avLst/>
-          </a:prstGeom>
-          <a:noFill/>
-        </p:spPr>
-        <p:txBody>
-          <a:bodyPr wrap="square" anchor="t" lIns="0" rIns="0" tIns="0" bIns="0">
-            <a:spAutoFit/>
-          </a:bodyPr>
-          <a:lstStyle/>
-          <a:p>
-            <a:pPr algn="l"/>
-            <a:r>
-              <a:rPr sz="2600" b="0" i="0">
+            <a:off x="777240" y="2377440"/>
+            <a:ext cx="10515600" cy="457200"/>
+          </a:xfrm>
+          <a:prstGeom prst="rect">
+            <a:avLst/>
+          </a:prstGeom>
+          <a:noFill/>
+        </p:spPr>
+        <p:txBody>
+          <a:bodyPr wrap="square" anchor="t" lIns="0" rIns="0" tIns="0" bIns="0">
+            <a:spAutoFit/>
+          </a:bodyPr>
+          <a:lstStyle/>
+          <a:p>
+            <a:pPr algn="l"/>
+            <a:r>
+              <a:rPr sz="1600" b="0" i="0">
+                <a:solidFill>
+                  <a:srgbClr val="A8A8A8"/>
+                </a:solidFill>
+                <a:latin typeface="Helvetica"/>
+              </a:rPr>
+              <a:t>Eight stages from raw RPW xlsx to a static dashboard. Reproducible end-to-end.</a:t>
+            </a:r>
+          </a:p>
+        </p:txBody>
+      </p:sp>
+      <p:sp>
+        <p:nvSpPr>
+          <p:cNvPr id="8" name="TextBox 7"/>
+          <p:cNvSpPr txBox="1"/>
+          <p:nvPr/>
+        </p:nvSpPr>
+        <p:spPr>
+          <a:xfrm>
+            <a:off x="777240" y="3154680"/>
+            <a:ext cx="457200" cy="365760"/>
+          </a:xfrm>
+          <a:prstGeom prst="rect">
+            <a:avLst/>
+          </a:prstGeom>
+          <a:noFill/>
+        </p:spPr>
+        <p:txBody>
+          <a:bodyPr wrap="square" anchor="t" lIns="0" rIns="0" tIns="0" bIns="0">
+            <a:spAutoFit/>
+          </a:bodyPr>
+          <a:lstStyle/>
+          <a:p>
+            <a:pPr algn="l"/>
+            <a:r>
+              <a:rPr sz="1100" b="0" i="0">
+                <a:solidFill>
+                  <a:srgbClr val="6B6B6B"/>
+                </a:solidFill>
+                <a:latin typeface="Menlo"/>
+              </a:rPr>
+              <a:t>01</a:t>
+            </a:r>
+          </a:p>
+        </p:txBody>
+      </p:sp>
+      <p:sp>
+        <p:nvSpPr>
+          <p:cNvPr id="9" name="TextBox 8"/>
+          <p:cNvSpPr txBox="1"/>
+          <p:nvPr/>
+        </p:nvSpPr>
+        <p:spPr>
+          <a:xfrm>
+            <a:off x="1280160" y="3154680"/>
+            <a:ext cx="2011680" cy="365760"/>
+          </a:xfrm>
+          <a:prstGeom prst="rect">
+            <a:avLst/>
+          </a:prstGeom>
+          <a:noFill/>
+        </p:spPr>
+        <p:txBody>
+          <a:bodyPr wrap="square" anchor="t" lIns="0" rIns="0" tIns="0" bIns="0">
+            <a:spAutoFit/>
+          </a:bodyPr>
+          <a:lstStyle/>
+          <a:p>
+            <a:pPr algn="l"/>
+            <a:r>
+              <a:rPr sz="1200" b="1" i="0">
                 <a:solidFill>
                   <a:srgbClr val="F2F2F2"/>
                 </a:solidFill>
                 <a:latin typeface="Menlo"/>
               </a:rPr>
-              <a:t>TCI  =  fee%  +  fxMargin%  +  κ · max(0, days−1)</a:t>
-            </a:r>
-          </a:p>
-        </p:txBody>
-      </p:sp>
-      <p:sp>
-        <p:nvSpPr>
-          <p:cNvPr id="8" name="TextBox 7"/>
-          <p:cNvSpPr txBox="1"/>
-          <p:nvPr/>
-        </p:nvSpPr>
-        <p:spPr>
-          <a:xfrm>
-            <a:off x="777240" y="4023360"/>
+              <a:t>INGEST</a:t>
+            </a:r>
+          </a:p>
+        </p:txBody>
+      </p:sp>
+      <p:sp>
+        <p:nvSpPr>
+          <p:cNvPr id="10" name="TextBox 9"/>
+          <p:cNvSpPr txBox="1"/>
+          <p:nvPr/>
+        </p:nvSpPr>
+        <p:spPr>
+          <a:xfrm>
+            <a:off x="3063240" y="3154680"/>
+            <a:ext cx="3291840" cy="365760"/>
+          </a:xfrm>
+          <a:prstGeom prst="rect">
+            <a:avLst/>
+          </a:prstGeom>
+          <a:noFill/>
+        </p:spPr>
+        <p:txBody>
+          <a:bodyPr wrap="square" anchor="t" lIns="0" rIns="0" tIns="0" bIns="0">
+            <a:spAutoFit/>
+          </a:bodyPr>
+          <a:lstStyle/>
+          <a:p>
+            <a:pPr algn="l"/>
+            <a:r>
+              <a:rPr sz="1200" b="0" i="0">
+                <a:solidFill>
+                  <a:srgbClr val="A8A8A8"/>
+                </a:solidFill>
+                <a:latin typeface="Helvetica"/>
+              </a:rPr>
+              <a:t>Download RPW xlsx + KNOMAD bilateral matrix</a:t>
+            </a:r>
+          </a:p>
+        </p:txBody>
+      </p:sp>
+      <p:sp>
+        <p:nvSpPr>
+          <p:cNvPr id="11" name="TextBox 10"/>
+          <p:cNvSpPr txBox="1"/>
+          <p:nvPr/>
+        </p:nvSpPr>
+        <p:spPr>
+          <a:xfrm>
+            <a:off x="777240" y="3721608"/>
+            <a:ext cx="457200" cy="365760"/>
+          </a:xfrm>
+          <a:prstGeom prst="rect">
+            <a:avLst/>
+          </a:prstGeom>
+          <a:noFill/>
+        </p:spPr>
+        <p:txBody>
+          <a:bodyPr wrap="square" anchor="t" lIns="0" rIns="0" tIns="0" bIns="0">
+            <a:spAutoFit/>
+          </a:bodyPr>
+          <a:lstStyle/>
+          <a:p>
+            <a:pPr algn="l"/>
+            <a:r>
+              <a:rPr sz="1100" b="0" i="0">
+                <a:solidFill>
+                  <a:srgbClr val="6B6B6B"/>
+                </a:solidFill>
+                <a:latin typeface="Menlo"/>
+              </a:rPr>
+              <a:t>02</a:t>
+            </a:r>
+          </a:p>
+        </p:txBody>
+      </p:sp>
+      <p:sp>
+        <p:nvSpPr>
+          <p:cNvPr id="12" name="TextBox 11"/>
+          <p:cNvSpPr txBox="1"/>
+          <p:nvPr/>
+        </p:nvSpPr>
+        <p:spPr>
+          <a:xfrm>
+            <a:off x="1280160" y="3721608"/>
+            <a:ext cx="2011680" cy="365760"/>
+          </a:xfrm>
+          <a:prstGeom prst="rect">
+            <a:avLst/>
+          </a:prstGeom>
+          <a:noFill/>
+        </p:spPr>
+        <p:txBody>
+          <a:bodyPr wrap="square" anchor="t" lIns="0" rIns="0" tIns="0" bIns="0">
+            <a:spAutoFit/>
+          </a:bodyPr>
+          <a:lstStyle/>
+          <a:p>
+            <a:pPr algn="l"/>
+            <a:r>
+              <a:rPr sz="1200" b="1" i="0">
+                <a:solidFill>
+                  <a:srgbClr val="F2F2F2"/>
+                </a:solidFill>
+                <a:latin typeface="Menlo"/>
+              </a:rPr>
+              <a:t>PREPROCESS</a:t>
+            </a:r>
+          </a:p>
+        </p:txBody>
+      </p:sp>
+      <p:sp>
+        <p:nvSpPr>
+          <p:cNvPr id="13" name="TextBox 12"/>
+          <p:cNvSpPr txBox="1"/>
+          <p:nvPr/>
+        </p:nvSpPr>
+        <p:spPr>
+          <a:xfrm>
+            <a:off x="3063240" y="3721608"/>
+            <a:ext cx="3291840" cy="365760"/>
+          </a:xfrm>
+          <a:prstGeom prst="rect">
+            <a:avLst/>
+          </a:prstGeom>
+          <a:noFill/>
+        </p:spPr>
+        <p:txBody>
+          <a:bodyPr wrap="square" anchor="t" lIns="0" rIns="0" tIns="0" bIns="0">
+            <a:spAutoFit/>
+          </a:bodyPr>
+          <a:lstStyle/>
+          <a:p>
+            <a:pPr algn="l"/>
+            <a:r>
+              <a:rPr sz="1200" b="0" i="0">
+                <a:solidFill>
+                  <a:srgbClr val="A8A8A8"/>
+                </a:solidFill>
+                <a:latin typeface="Helvetica"/>
+              </a:rPr>
+              <a:t>Schema sniff  ·  cc1 / cc2 melt  ·  feature derivation</a:t>
+            </a:r>
+          </a:p>
+        </p:txBody>
+      </p:sp>
+      <p:sp>
+        <p:nvSpPr>
+          <p:cNvPr id="14" name="TextBox 13"/>
+          <p:cNvSpPr txBox="1"/>
+          <p:nvPr/>
+        </p:nvSpPr>
+        <p:spPr>
+          <a:xfrm>
+            <a:off x="777240" y="4288536"/>
+            <a:ext cx="457200" cy="365760"/>
+          </a:xfrm>
+          <a:prstGeom prst="rect">
+            <a:avLst/>
+          </a:prstGeom>
+          <a:noFill/>
+        </p:spPr>
+        <p:txBody>
+          <a:bodyPr wrap="square" anchor="t" lIns="0" rIns="0" tIns="0" bIns="0">
+            <a:spAutoFit/>
+          </a:bodyPr>
+          <a:lstStyle/>
+          <a:p>
+            <a:pPr algn="l"/>
+            <a:r>
+              <a:rPr sz="1100" b="0" i="0">
+                <a:solidFill>
+                  <a:srgbClr val="6B6B6B"/>
+                </a:solidFill>
+                <a:latin typeface="Menlo"/>
+              </a:rPr>
+              <a:t>03</a:t>
+            </a:r>
+          </a:p>
+        </p:txBody>
+      </p:sp>
+      <p:sp>
+        <p:nvSpPr>
+          <p:cNvPr id="15" name="TextBox 14"/>
+          <p:cNvSpPr txBox="1"/>
+          <p:nvPr/>
+        </p:nvSpPr>
+        <p:spPr>
+          <a:xfrm>
+            <a:off x="1280160" y="4288536"/>
+            <a:ext cx="2011680" cy="365760"/>
+          </a:xfrm>
+          <a:prstGeom prst="rect">
+            <a:avLst/>
+          </a:prstGeom>
+          <a:noFill/>
+        </p:spPr>
+        <p:txBody>
+          <a:bodyPr wrap="square" anchor="t" lIns="0" rIns="0" tIns="0" bIns="0">
+            <a:spAutoFit/>
+          </a:bodyPr>
+          <a:lstStyle/>
+          <a:p>
+            <a:pPr algn="l"/>
+            <a:r>
+              <a:rPr sz="1200" b="1" i="0">
+                <a:solidFill>
+                  <a:srgbClr val="F2F2F2"/>
+                </a:solidFill>
+                <a:latin typeface="Menlo"/>
+              </a:rPr>
+              <a:t>TCI</a:t>
+            </a:r>
+          </a:p>
+        </p:txBody>
+      </p:sp>
+      <p:sp>
+        <p:nvSpPr>
+          <p:cNvPr id="16" name="TextBox 15"/>
+          <p:cNvSpPr txBox="1"/>
+          <p:nvPr/>
+        </p:nvSpPr>
+        <p:spPr>
+          <a:xfrm>
+            <a:off x="3063240" y="4288536"/>
+            <a:ext cx="3291840" cy="365760"/>
+          </a:xfrm>
+          <a:prstGeom prst="rect">
+            <a:avLst/>
+          </a:prstGeom>
+          <a:noFill/>
+        </p:spPr>
+        <p:txBody>
+          <a:bodyPr wrap="square" anchor="t" lIns="0" rIns="0" tIns="0" bIns="0">
+            <a:spAutoFit/>
+          </a:bodyPr>
+          <a:lstStyle/>
+          <a:p>
+            <a:pPr algn="l"/>
+            <a:r>
+              <a:rPr sz="1200" b="0" i="0">
+                <a:solidFill>
+                  <a:srgbClr val="A8A8A8"/>
+                </a:solidFill>
+                <a:latin typeface="Helvetica"/>
+              </a:rPr>
+              <a:t>Corridor × period × amount aggregation</a:t>
+            </a:r>
+          </a:p>
+        </p:txBody>
+      </p:sp>
+      <p:sp>
+        <p:nvSpPr>
+          <p:cNvPr id="17" name="TextBox 16"/>
+          <p:cNvSpPr txBox="1"/>
+          <p:nvPr/>
+        </p:nvSpPr>
+        <p:spPr>
+          <a:xfrm>
+            <a:off x="777240" y="4855464"/>
+            <a:ext cx="457200" cy="365760"/>
+          </a:xfrm>
+          <a:prstGeom prst="rect">
+            <a:avLst/>
+          </a:prstGeom>
+          <a:noFill/>
+        </p:spPr>
+        <p:txBody>
+          <a:bodyPr wrap="square" anchor="t" lIns="0" rIns="0" tIns="0" bIns="0">
+            <a:spAutoFit/>
+          </a:bodyPr>
+          <a:lstStyle/>
+          <a:p>
+            <a:pPr algn="l"/>
+            <a:r>
+              <a:rPr sz="1100" b="0" i="0">
+                <a:solidFill>
+                  <a:srgbClr val="6B6B6B"/>
+                </a:solidFill>
+                <a:latin typeface="Menlo"/>
+              </a:rPr>
+              <a:t>04</a:t>
+            </a:r>
+          </a:p>
+        </p:txBody>
+      </p:sp>
+      <p:sp>
+        <p:nvSpPr>
+          <p:cNvPr id="18" name="TextBox 17"/>
+          <p:cNvSpPr txBox="1"/>
+          <p:nvPr/>
+        </p:nvSpPr>
+        <p:spPr>
+          <a:xfrm>
+            <a:off x="1280160" y="4855464"/>
+            <a:ext cx="2011680" cy="365760"/>
+          </a:xfrm>
+          <a:prstGeom prst="rect">
+            <a:avLst/>
+          </a:prstGeom>
+          <a:noFill/>
+        </p:spPr>
+        <p:txBody>
+          <a:bodyPr wrap="square" anchor="t" lIns="0" rIns="0" tIns="0" bIns="0">
+            <a:spAutoFit/>
+          </a:bodyPr>
+          <a:lstStyle/>
+          <a:p>
+            <a:pPr algn="l"/>
+            <a:r>
+              <a:rPr sz="1200" b="1" i="0">
+                <a:solidFill>
+                  <a:srgbClr val="F2F2F2"/>
+                </a:solidFill>
+                <a:latin typeface="Menlo"/>
+              </a:rPr>
+              <a:t>STABLECOIN</a:t>
+            </a:r>
+          </a:p>
+        </p:txBody>
+      </p:sp>
+      <p:sp>
+        <p:nvSpPr>
+          <p:cNvPr id="19" name="TextBox 18"/>
+          <p:cNvSpPr txBox="1"/>
+          <p:nvPr/>
+        </p:nvSpPr>
+        <p:spPr>
+          <a:xfrm>
+            <a:off x="3063240" y="4855464"/>
+            <a:ext cx="3291840" cy="365760"/>
+          </a:xfrm>
+          <a:prstGeom prst="rect">
+            <a:avLst/>
+          </a:prstGeom>
+          <a:noFill/>
+        </p:spPr>
+        <p:txBody>
+          <a:bodyPr wrap="square" anchor="t" lIns="0" rIns="0" tIns="0" bIns="0">
+            <a:spAutoFit/>
+          </a:bodyPr>
+          <a:lstStyle/>
+          <a:p>
+            <a:pPr algn="l"/>
+            <a:r>
+              <a:rPr sz="1200" b="0" i="0">
+                <a:solidFill>
+                  <a:srgbClr val="A8A8A8"/>
+                </a:solidFill>
+                <a:latin typeface="Helvetica"/>
+              </a:rPr>
+              <a:t>Counterfactual cost model + savings</a:t>
+            </a:r>
+          </a:p>
+        </p:txBody>
+      </p:sp>
+      <p:sp>
+        <p:nvSpPr>
+          <p:cNvPr id="20" name="TextBox 19"/>
+          <p:cNvSpPr txBox="1"/>
+          <p:nvPr/>
+        </p:nvSpPr>
+        <p:spPr>
+          <a:xfrm>
+            <a:off x="6446520" y="3154680"/>
+            <a:ext cx="457200" cy="365760"/>
+          </a:xfrm>
+          <a:prstGeom prst="rect">
+            <a:avLst/>
+          </a:prstGeom>
+          <a:noFill/>
+        </p:spPr>
+        <p:txBody>
+          <a:bodyPr wrap="square" anchor="t" lIns="0" rIns="0" tIns="0" bIns="0">
+            <a:spAutoFit/>
+          </a:bodyPr>
+          <a:lstStyle/>
+          <a:p>
+            <a:pPr algn="l"/>
+            <a:r>
+              <a:rPr sz="1100" b="0" i="0">
+                <a:solidFill>
+                  <a:srgbClr val="6B6B6B"/>
+                </a:solidFill>
+                <a:latin typeface="Menlo"/>
+              </a:rPr>
+              <a:t>05</a:t>
+            </a:r>
+          </a:p>
+        </p:txBody>
+      </p:sp>
+      <p:sp>
+        <p:nvSpPr>
+          <p:cNvPr id="21" name="TextBox 20"/>
+          <p:cNvSpPr txBox="1"/>
+          <p:nvPr/>
+        </p:nvSpPr>
+        <p:spPr>
+          <a:xfrm>
+            <a:off x="6949440" y="3154680"/>
+            <a:ext cx="2011680" cy="365760"/>
+          </a:xfrm>
+          <a:prstGeom prst="rect">
+            <a:avLst/>
+          </a:prstGeom>
+          <a:noFill/>
+        </p:spPr>
+        <p:txBody>
+          <a:bodyPr wrap="square" anchor="t" lIns="0" rIns="0" tIns="0" bIns="0">
+            <a:spAutoFit/>
+          </a:bodyPr>
+          <a:lstStyle/>
+          <a:p>
+            <a:pPr algn="l"/>
+            <a:r>
+              <a:rPr sz="1200" b="1" i="0">
+                <a:solidFill>
+                  <a:srgbClr val="F2F2F2"/>
+                </a:solidFill>
+                <a:latin typeface="Menlo"/>
+              </a:rPr>
+              <a:t>REGRESSION</a:t>
+            </a:r>
+          </a:p>
+        </p:txBody>
+      </p:sp>
+      <p:sp>
+        <p:nvSpPr>
+          <p:cNvPr id="22" name="TextBox 21"/>
+          <p:cNvSpPr txBox="1"/>
+          <p:nvPr/>
+        </p:nvSpPr>
+        <p:spPr>
+          <a:xfrm>
+            <a:off x="8732520" y="3154680"/>
+            <a:ext cx="3291840" cy="365760"/>
+          </a:xfrm>
+          <a:prstGeom prst="rect">
+            <a:avLst/>
+          </a:prstGeom>
+          <a:noFill/>
+        </p:spPr>
+        <p:txBody>
+          <a:bodyPr wrap="square" anchor="t" lIns="0" rIns="0" tIns="0" bIns="0">
+            <a:spAutoFit/>
+          </a:bodyPr>
+          <a:lstStyle/>
+          <a:p>
+            <a:pPr algn="l"/>
+            <a:r>
+              <a:rPr sz="1200" b="0" i="0">
+                <a:solidFill>
+                  <a:srgbClr val="A8A8A8"/>
+                </a:solidFill>
+                <a:latin typeface="Helvetica"/>
+              </a:rPr>
+              <a:t>Two-way fixed effects  ·  clustered SE</a:t>
+            </a:r>
+          </a:p>
+        </p:txBody>
+      </p:sp>
+      <p:sp>
+        <p:nvSpPr>
+          <p:cNvPr id="23" name="TextBox 22"/>
+          <p:cNvSpPr txBox="1"/>
+          <p:nvPr/>
+        </p:nvSpPr>
+        <p:spPr>
+          <a:xfrm>
+            <a:off x="6446520" y="3721608"/>
+            <a:ext cx="457200" cy="365760"/>
+          </a:xfrm>
+          <a:prstGeom prst="rect">
+            <a:avLst/>
+          </a:prstGeom>
+          <a:noFill/>
+        </p:spPr>
+        <p:txBody>
+          <a:bodyPr wrap="square" anchor="t" lIns="0" rIns="0" tIns="0" bIns="0">
+            <a:spAutoFit/>
+          </a:bodyPr>
+          <a:lstStyle/>
+          <a:p>
+            <a:pPr algn="l"/>
+            <a:r>
+              <a:rPr sz="1100" b="0" i="0">
+                <a:solidFill>
+                  <a:srgbClr val="6B6B6B"/>
+                </a:solidFill>
+                <a:latin typeface="Menlo"/>
+              </a:rPr>
+              <a:t>06</a:t>
+            </a:r>
+          </a:p>
+        </p:txBody>
+      </p:sp>
+      <p:sp>
+        <p:nvSpPr>
+          <p:cNvPr id="24" name="TextBox 23"/>
+          <p:cNvSpPr txBox="1"/>
+          <p:nvPr/>
+        </p:nvSpPr>
+        <p:spPr>
+          <a:xfrm>
+            <a:off x="6949440" y="3721608"/>
+            <a:ext cx="2011680" cy="365760"/>
+          </a:xfrm>
+          <a:prstGeom prst="rect">
+            <a:avLst/>
+          </a:prstGeom>
+          <a:noFill/>
+        </p:spPr>
+        <p:txBody>
+          <a:bodyPr wrap="square" anchor="t" lIns="0" rIns="0" tIns="0" bIns="0">
+            <a:spAutoFit/>
+          </a:bodyPr>
+          <a:lstStyle/>
+          <a:p>
+            <a:pPr algn="l"/>
+            <a:r>
+              <a:rPr sz="1200" b="1" i="0">
+                <a:solidFill>
+                  <a:srgbClr val="F2F2F2"/>
+                </a:solidFill>
+                <a:latin typeface="Menlo"/>
+              </a:rPr>
+              <a:t>AGGREGATE</a:t>
+            </a:r>
+          </a:p>
+        </p:txBody>
+      </p:sp>
+      <p:sp>
+        <p:nvSpPr>
+          <p:cNvPr id="25" name="TextBox 24"/>
+          <p:cNvSpPr txBox="1"/>
+          <p:nvPr/>
+        </p:nvSpPr>
+        <p:spPr>
+          <a:xfrm>
+            <a:off x="8732520" y="3721608"/>
+            <a:ext cx="3291840" cy="365760"/>
+          </a:xfrm>
+          <a:prstGeom prst="rect">
+            <a:avLst/>
+          </a:prstGeom>
+          <a:noFill/>
+        </p:spPr>
+        <p:txBody>
+          <a:bodyPr wrap="square" anchor="t" lIns="0" rIns="0" tIns="0" bIns="0">
+            <a:spAutoFit/>
+          </a:bodyPr>
+          <a:lstStyle/>
+          <a:p>
+            <a:pPr algn="l"/>
+            <a:r>
+              <a:rPr sz="1200" b="0" i="0">
+                <a:solidFill>
+                  <a:srgbClr val="A8A8A8"/>
+                </a:solidFill>
+                <a:latin typeface="Helvetica"/>
+              </a:rPr>
+              <a:t>Diaspora burden + corridor rankings</a:t>
+            </a:r>
+          </a:p>
+        </p:txBody>
+      </p:sp>
+      <p:sp>
+        <p:nvSpPr>
+          <p:cNvPr id="26" name="TextBox 25"/>
+          <p:cNvSpPr txBox="1"/>
+          <p:nvPr/>
+        </p:nvSpPr>
+        <p:spPr>
+          <a:xfrm>
+            <a:off x="6446520" y="4288536"/>
+            <a:ext cx="457200" cy="365760"/>
+          </a:xfrm>
+          <a:prstGeom prst="rect">
+            <a:avLst/>
+          </a:prstGeom>
+          <a:noFill/>
+        </p:spPr>
+        <p:txBody>
+          <a:bodyPr wrap="square" anchor="t" lIns="0" rIns="0" tIns="0" bIns="0">
+            <a:spAutoFit/>
+          </a:bodyPr>
+          <a:lstStyle/>
+          <a:p>
+            <a:pPr algn="l"/>
+            <a:r>
+              <a:rPr sz="1100" b="0" i="0">
+                <a:solidFill>
+                  <a:srgbClr val="6B6B6B"/>
+                </a:solidFill>
+                <a:latin typeface="Menlo"/>
+              </a:rPr>
+              <a:t>07</a:t>
+            </a:r>
+          </a:p>
+        </p:txBody>
+      </p:sp>
+      <p:sp>
+        <p:nvSpPr>
+          <p:cNvPr id="27" name="TextBox 26"/>
+          <p:cNvSpPr txBox="1"/>
+          <p:nvPr/>
+        </p:nvSpPr>
+        <p:spPr>
+          <a:xfrm>
+            <a:off x="6949440" y="4288536"/>
+            <a:ext cx="2011680" cy="365760"/>
+          </a:xfrm>
+          <a:prstGeom prst="rect">
+            <a:avLst/>
+          </a:prstGeom>
+          <a:noFill/>
+        </p:spPr>
+        <p:txBody>
+          <a:bodyPr wrap="square" anchor="t" lIns="0" rIns="0" tIns="0" bIns="0">
+            <a:spAutoFit/>
+          </a:bodyPr>
+          <a:lstStyle/>
+          <a:p>
+            <a:pPr algn="l"/>
+            <a:r>
+              <a:rPr sz="1200" b="1" i="0">
+                <a:solidFill>
+                  <a:srgbClr val="F2F2F2"/>
+                </a:solidFill>
+                <a:latin typeface="Menlo"/>
+              </a:rPr>
+              <a:t>EXPORT</a:t>
+            </a:r>
+          </a:p>
+        </p:txBody>
+      </p:sp>
+      <p:sp>
+        <p:nvSpPr>
+          <p:cNvPr id="28" name="TextBox 27"/>
+          <p:cNvSpPr txBox="1"/>
+          <p:nvPr/>
+        </p:nvSpPr>
+        <p:spPr>
+          <a:xfrm>
+            <a:off x="8732520" y="4288536"/>
+            <a:ext cx="3291840" cy="365760"/>
+          </a:xfrm>
+          <a:prstGeom prst="rect">
+            <a:avLst/>
+          </a:prstGeom>
+          <a:noFill/>
+        </p:spPr>
+        <p:txBody>
+          <a:bodyPr wrap="square" anchor="t" lIns="0" rIns="0" tIns="0" bIns="0">
+            <a:spAutoFit/>
+          </a:bodyPr>
+          <a:lstStyle/>
+          <a:p>
+            <a:pPr algn="l"/>
+            <a:r>
+              <a:rPr sz="1200" b="0" i="0">
+                <a:solidFill>
+                  <a:srgbClr val="A8A8A8"/>
+                </a:solidFill>
+                <a:latin typeface="Helvetica"/>
+              </a:rPr>
+              <a:t>Round  ·  null-safe JSON for the dashboard</a:t>
+            </a:r>
+          </a:p>
+        </p:txBody>
+      </p:sp>
+      <p:sp>
+        <p:nvSpPr>
+          <p:cNvPr id="29" name="TextBox 28"/>
+          <p:cNvSpPr txBox="1"/>
+          <p:nvPr/>
+        </p:nvSpPr>
+        <p:spPr>
+          <a:xfrm>
+            <a:off x="6446520" y="4855464"/>
+            <a:ext cx="457200" cy="365760"/>
+          </a:xfrm>
+          <a:prstGeom prst="rect">
+            <a:avLst/>
+          </a:prstGeom>
+          <a:noFill/>
+        </p:spPr>
+        <p:txBody>
+          <a:bodyPr wrap="square" anchor="t" lIns="0" rIns="0" tIns="0" bIns="0">
+            <a:spAutoFit/>
+          </a:bodyPr>
+          <a:lstStyle/>
+          <a:p>
+            <a:pPr algn="l"/>
+            <a:r>
+              <a:rPr sz="1100" b="0" i="0">
+                <a:solidFill>
+                  <a:srgbClr val="6B6B6B"/>
+                </a:solidFill>
+                <a:latin typeface="Menlo"/>
+              </a:rPr>
+              <a:t>08</a:t>
+            </a:r>
+          </a:p>
+        </p:txBody>
+      </p:sp>
+      <p:sp>
+        <p:nvSpPr>
+          <p:cNvPr id="30" name="TextBox 29"/>
+          <p:cNvSpPr txBox="1"/>
+          <p:nvPr/>
+        </p:nvSpPr>
+        <p:spPr>
+          <a:xfrm>
+            <a:off x="6949440" y="4855464"/>
+            <a:ext cx="2011680" cy="365760"/>
+          </a:xfrm>
+          <a:prstGeom prst="rect">
+            <a:avLst/>
+          </a:prstGeom>
+          <a:noFill/>
+        </p:spPr>
+        <p:txBody>
+          <a:bodyPr wrap="square" anchor="t" lIns="0" rIns="0" tIns="0" bIns="0">
+            <a:spAutoFit/>
+          </a:bodyPr>
+          <a:lstStyle/>
+          <a:p>
+            <a:pPr algn="l"/>
+            <a:r>
+              <a:rPr sz="1200" b="1" i="0">
+                <a:solidFill>
+                  <a:srgbClr val="F2F2F2"/>
+                </a:solidFill>
+                <a:latin typeface="Menlo"/>
+              </a:rPr>
+              <a:t>FIGURES</a:t>
+            </a:r>
+          </a:p>
+        </p:txBody>
+      </p:sp>
+      <p:sp>
+        <p:nvSpPr>
+          <p:cNvPr id="31" name="TextBox 30"/>
+          <p:cNvSpPr txBox="1"/>
+          <p:nvPr/>
+        </p:nvSpPr>
+        <p:spPr>
+          <a:xfrm>
+            <a:off x="8732520" y="4855464"/>
+            <a:ext cx="3291840" cy="365760"/>
+          </a:xfrm>
+          <a:prstGeom prst="rect">
+            <a:avLst/>
+          </a:prstGeom>
+          <a:noFill/>
+        </p:spPr>
+        <p:txBody>
+          <a:bodyPr wrap="square" anchor="t" lIns="0" rIns="0" tIns="0" bIns="0">
+            <a:spAutoFit/>
+          </a:bodyPr>
+          <a:lstStyle/>
+          <a:p>
+            <a:pPr algn="l"/>
+            <a:r>
+              <a:rPr sz="1200" b="0" i="0">
+                <a:solidFill>
+                  <a:srgbClr val="A8A8A8"/>
+                </a:solidFill>
+                <a:latin typeface="Helvetica"/>
+              </a:rPr>
+              <a:t>Plotly  ·  300 DPI PNG for the report</a:t>
+            </a:r>
+          </a:p>
+        </p:txBody>
+      </p:sp>
+      <p:sp>
+        <p:nvSpPr>
+          <p:cNvPr id="32" name="TextBox 31"/>
+          <p:cNvSpPr txBox="1"/>
+          <p:nvPr/>
+        </p:nvSpPr>
+        <p:spPr>
+          <a:xfrm>
+            <a:off x="777240" y="5989320"/>
             <a:ext cx="10515600" cy="365760"/>
           </a:xfrm>
           <a:prstGeom prst="rect">
@@ -8609,112 +9826,7 @@
                 </a:solidFill>
                 <a:latin typeface="Menlo"/>
               </a:rPr>
-              <a:t>WHERE</a:t>
-            </a:r>
-          </a:p>
-        </p:txBody>
-      </p:sp>
-      <p:sp>
-        <p:nvSpPr>
-          <p:cNvPr id="9" name="TextBox 8"/>
-          <p:cNvSpPr txBox="1"/>
-          <p:nvPr/>
-        </p:nvSpPr>
-        <p:spPr>
-          <a:xfrm>
-            <a:off x="777240" y="4370832"/>
-            <a:ext cx="10515600" cy="457200"/>
-          </a:xfrm>
-          <a:prstGeom prst="rect">
-            <a:avLst/>
-          </a:prstGeom>
-          <a:noFill/>
-        </p:spPr>
-        <p:txBody>
-          <a:bodyPr wrap="square" anchor="t" lIns="0" rIns="0" tIns="0" bIns="0">
-            <a:spAutoFit/>
-          </a:bodyPr>
-          <a:lstStyle/>
-          <a:p>
-            <a:pPr algn="l"/>
-            <a:r>
-              <a:rPr sz="1500" b="0" i="0">
-                <a:solidFill>
-                  <a:srgbClr val="A8A8A8"/>
-                </a:solidFill>
-                <a:latin typeface="Helvetica"/>
-              </a:rPr>
-              <a:t>κ = 0.10 % per day past same-day  ·  cost-of-capital proxy for the receiving household</a:t>
-            </a:r>
-          </a:p>
-        </p:txBody>
-      </p:sp>
-      <p:sp>
-        <p:nvSpPr>
-          <p:cNvPr id="10" name="TextBox 9"/>
-          <p:cNvSpPr txBox="1"/>
-          <p:nvPr/>
-        </p:nvSpPr>
-        <p:spPr>
-          <a:xfrm>
-            <a:off x="777240" y="4846320"/>
-            <a:ext cx="10515600" cy="457200"/>
-          </a:xfrm>
-          <a:prstGeom prst="rect">
-            <a:avLst/>
-          </a:prstGeom>
-          <a:noFill/>
-        </p:spPr>
-        <p:txBody>
-          <a:bodyPr wrap="square" anchor="t" lIns="0" rIns="0" tIns="0" bIns="0">
-            <a:spAutoFit/>
-          </a:bodyPr>
-          <a:lstStyle/>
-          <a:p>
-            <a:pPr algn="l"/>
-            <a:r>
-              <a:rPr sz="1500" b="0" i="0">
-                <a:solidFill>
-                  <a:srgbClr val="A8A8A8"/>
-                </a:solidFill>
-                <a:latin typeface="Helvetica"/>
-              </a:rPr>
-              <a:t>days  ·  RPW "speed actual" mapped to (under 1h, same day) → 0,  next day → 1,  2d → 2,  3-5d → 4</a:t>
-            </a:r>
-          </a:p>
-        </p:txBody>
-      </p:sp>
-      <p:sp>
-        <p:nvSpPr>
-          <p:cNvPr id="11" name="TextBox 10"/>
-          <p:cNvSpPr txBox="1"/>
-          <p:nvPr/>
-        </p:nvSpPr>
-        <p:spPr>
-          <a:xfrm>
-            <a:off x="777240" y="5321808"/>
-            <a:ext cx="10515600" cy="457200"/>
-          </a:xfrm>
-          <a:prstGeom prst="rect">
-            <a:avLst/>
-          </a:prstGeom>
-          <a:noFill/>
-        </p:spPr>
-        <p:txBody>
-          <a:bodyPr wrap="square" anchor="t" lIns="0" rIns="0" tIns="0" bIns="0">
-            <a:spAutoFit/>
-          </a:bodyPr>
-          <a:lstStyle/>
-          <a:p>
-            <a:pPr algn="l"/>
-            <a:r>
-              <a:rPr sz="1500" b="0" i="0">
-                <a:solidFill>
-                  <a:srgbClr val="A8A8A8"/>
-                </a:solidFill>
-                <a:latin typeface="Helvetica"/>
-              </a:rPr>
-              <a:t>Corridor-level TCI is the unweighted mean across providers; median reported as a robustness check.</a:t>
+              <a:t>RUN  ·  uv run python scripts/run_all.py    ~ 90 s end-to-end on cached data.</a:t>
             </a:r>
           </a:p>
         </p:txBody>
@@ -8810,7 +9922,7 @@
                 </a:solidFill>
                 <a:latin typeface="Menlo"/>
               </a:rPr>
-              <a:t>06  ·  METHODOLOGY  ·  STABLECOIN</a:t>
+              <a:t>06  ·  DATA ENGINEERING</a:t>
             </a:r>
           </a:p>
         </p:txBody>
@@ -8845,7 +9957,7 @@
                 </a:solidFill>
                 <a:latin typeface="Menlo"/>
               </a:rPr>
-              <a:t>07 / 17</a:t>
+              <a:t>07 / 18</a:t>
             </a:r>
           </a:p>
         </p:txBody>
@@ -8915,7 +10027,7 @@
                 </a:solidFill>
                 <a:latin typeface="Helvetica Neue"/>
               </a:rPr>
-              <a:t>Stablecoin counterfactual.</a:t>
+              <a:t>Data engineering.</a:t>
             </a:r>
           </a:p>
         </p:txBody>
@@ -8928,77 +10040,672 @@
         </p:nvSpPr>
         <p:spPr>
           <a:xfrm>
-            <a:off x="777240" y="2606040"/>
-            <a:ext cx="10972800" cy="914400"/>
-          </a:xfrm>
-          <a:prstGeom prst="rect">
-            <a:avLst/>
-          </a:prstGeom>
-          <a:noFill/>
-        </p:spPr>
-        <p:txBody>
-          <a:bodyPr wrap="square" anchor="t" lIns="0" rIns="0" tIns="0" bIns="0">
-            <a:spAutoFit/>
-          </a:bodyPr>
-          <a:lstStyle/>
-          <a:p>
-            <a:pPr algn="l"/>
-            <a:r>
-              <a:rPr sz="2200" b="0" i="0">
+            <a:off x="777240" y="2240280"/>
+            <a:ext cx="10515600" cy="457200"/>
+          </a:xfrm>
+          <a:prstGeom prst="rect">
+            <a:avLst/>
+          </a:prstGeom>
+          <a:noFill/>
+        </p:spPr>
+        <p:txBody>
+          <a:bodyPr wrap="square" anchor="t" lIns="0" rIns="0" tIns="0" bIns="0">
+            <a:spAutoFit/>
+          </a:bodyPr>
+          <a:lstStyle/>
+          <a:p>
+            <a:pPr algn="l"/>
+            <a:r>
+              <a:rPr sz="1600" b="0" i="0">
+                <a:solidFill>
+                  <a:srgbClr val="A8A8A8"/>
+                </a:solidFill>
+                <a:latin typeface="Helvetica"/>
+              </a:rPr>
+              <a:t>Six transformations turn raw RPW xlsx into a clean panel ready for analysis.</a:t>
+            </a:r>
+          </a:p>
+        </p:txBody>
+      </p:sp>
+      <p:sp>
+        <p:nvSpPr>
+          <p:cNvPr id="8" name="TextBox 7"/>
+          <p:cNvSpPr txBox="1"/>
+          <p:nvPr/>
+        </p:nvSpPr>
+        <p:spPr>
+          <a:xfrm>
+            <a:off x="777240" y="3063240"/>
+            <a:ext cx="457200" cy="365760"/>
+          </a:xfrm>
+          <a:prstGeom prst="rect">
+            <a:avLst/>
+          </a:prstGeom>
+          <a:noFill/>
+        </p:spPr>
+        <p:txBody>
+          <a:bodyPr wrap="square" anchor="t" lIns="0" rIns="0" tIns="0" bIns="0">
+            <a:spAutoFit/>
+          </a:bodyPr>
+          <a:lstStyle/>
+          <a:p>
+            <a:pPr algn="l"/>
+            <a:r>
+              <a:rPr sz="1100" b="0" i="0">
+                <a:solidFill>
+                  <a:srgbClr val="6B6B6B"/>
+                </a:solidFill>
+                <a:latin typeface="Menlo"/>
+              </a:rPr>
+              <a:t>01</a:t>
+            </a:r>
+          </a:p>
+        </p:txBody>
+      </p:sp>
+      <p:sp>
+        <p:nvSpPr>
+          <p:cNvPr id="9" name="TextBox 8"/>
+          <p:cNvSpPr txBox="1"/>
+          <p:nvPr/>
+        </p:nvSpPr>
+        <p:spPr>
+          <a:xfrm>
+            <a:off x="1280160" y="3063240"/>
+            <a:ext cx="2377440" cy="365760"/>
+          </a:xfrm>
+          <a:prstGeom prst="rect">
+            <a:avLst/>
+          </a:prstGeom>
+          <a:noFill/>
+        </p:spPr>
+        <p:txBody>
+          <a:bodyPr wrap="square" anchor="t" lIns="0" rIns="0" tIns="0" bIns="0">
+            <a:spAutoFit/>
+          </a:bodyPr>
+          <a:lstStyle/>
+          <a:p>
+            <a:pPr algn="l"/>
+            <a:r>
+              <a:rPr sz="1200" b="1" i="0">
                 <a:solidFill>
                   <a:srgbClr val="F2F2F2"/>
                 </a:solidFill>
                 <a:latin typeface="Menlo"/>
               </a:rPr>
-              <a:t>SC = onramp(s)  +  offramp(d)  +  (gas / A × 100)  +  fxSpread(d)</a:t>
-            </a:r>
-          </a:p>
-        </p:txBody>
-      </p:sp>
-      <p:sp>
-        <p:nvSpPr>
-          <p:cNvPr id="8" name="TextBox 7"/>
-          <p:cNvSpPr txBox="1"/>
-          <p:nvPr/>
-        </p:nvSpPr>
-        <p:spPr>
-          <a:xfrm>
-            <a:off x="777240" y="3246120"/>
-            <a:ext cx="10972800" cy="914400"/>
-          </a:xfrm>
-          <a:prstGeom prst="rect">
-            <a:avLst/>
-          </a:prstGeom>
-          <a:noFill/>
-        </p:spPr>
-        <p:txBody>
-          <a:bodyPr wrap="square" anchor="t" lIns="0" rIns="0" tIns="0" bIns="0">
-            <a:spAutoFit/>
-          </a:bodyPr>
-          <a:lstStyle/>
-          <a:p>
-            <a:pPr algn="l"/>
-            <a:r>
-              <a:rPr sz="2200" b="0" i="0">
+              <a:t>SCHEMA SNIFF</a:t>
+            </a:r>
+          </a:p>
+        </p:txBody>
+      </p:sp>
+      <p:sp>
+        <p:nvSpPr>
+          <p:cNvPr id="10" name="TextBox 9"/>
+          <p:cNvSpPr txBox="1"/>
+          <p:nvPr/>
+        </p:nvSpPr>
+        <p:spPr>
+          <a:xfrm>
+            <a:off x="3383280" y="3063240"/>
+            <a:ext cx="7772400" cy="365760"/>
+          </a:xfrm>
+          <a:prstGeom prst="rect">
+            <a:avLst/>
+          </a:prstGeom>
+          <a:noFill/>
+        </p:spPr>
+        <p:txBody>
+          <a:bodyPr wrap="square" anchor="t" lIns="0" rIns="0" tIns="0" bIns="0">
+            <a:spAutoFit/>
+          </a:bodyPr>
+          <a:lstStyle/>
+          <a:p>
+            <a:pPr algn="l"/>
+            <a:r>
+              <a:rPr sz="1200" b="0" i="0">
+                <a:solidFill>
+                  <a:srgbClr val="A8A8A8"/>
+                </a:solidFill>
+                <a:latin typeface="Helvetica"/>
+              </a:rPr>
+              <a:t>Match column names against canonical CANDIDATE_COLUMNS  ·  RPW renames quarterly</a:t>
+            </a:r>
+          </a:p>
+        </p:txBody>
+      </p:sp>
+      <p:sp>
+        <p:nvSpPr>
+          <p:cNvPr id="11" name="TextBox 10"/>
+          <p:cNvSpPr txBox="1"/>
+          <p:nvPr/>
+        </p:nvSpPr>
+        <p:spPr>
+          <a:xfrm>
+            <a:off x="777240" y="3566160"/>
+            <a:ext cx="457200" cy="365760"/>
+          </a:xfrm>
+          <a:prstGeom prst="rect">
+            <a:avLst/>
+          </a:prstGeom>
+          <a:noFill/>
+        </p:spPr>
+        <p:txBody>
+          <a:bodyPr wrap="square" anchor="t" lIns="0" rIns="0" tIns="0" bIns="0">
+            <a:spAutoFit/>
+          </a:bodyPr>
+          <a:lstStyle/>
+          <a:p>
+            <a:pPr algn="l"/>
+            <a:r>
+              <a:rPr sz="1100" b="0" i="0">
+                <a:solidFill>
+                  <a:srgbClr val="6B6B6B"/>
+                </a:solidFill>
+                <a:latin typeface="Menlo"/>
+              </a:rPr>
+              <a:t>02</a:t>
+            </a:r>
+          </a:p>
+        </p:txBody>
+      </p:sp>
+      <p:sp>
+        <p:nvSpPr>
+          <p:cNvPr id="12" name="TextBox 11"/>
+          <p:cNvSpPr txBox="1"/>
+          <p:nvPr/>
+        </p:nvSpPr>
+        <p:spPr>
+          <a:xfrm>
+            <a:off x="1280160" y="3566160"/>
+            <a:ext cx="2377440" cy="365760"/>
+          </a:xfrm>
+          <a:prstGeom prst="rect">
+            <a:avLst/>
+          </a:prstGeom>
+          <a:noFill/>
+        </p:spPr>
+        <p:txBody>
+          <a:bodyPr wrap="square" anchor="t" lIns="0" rIns="0" tIns="0" bIns="0">
+            <a:spAutoFit/>
+          </a:bodyPr>
+          <a:lstStyle/>
+          <a:p>
+            <a:pPr algn="l"/>
+            <a:r>
+              <a:rPr sz="1200" b="1" i="0">
                 <a:solidFill>
                   <a:srgbClr val="F2F2F2"/>
                 </a:solidFill>
                 <a:latin typeface="Menlo"/>
               </a:rPr>
-              <a:t>savings = max(0,  TCI  −  SC)  ·  V(s,d)</a:t>
-            </a:r>
-          </a:p>
-        </p:txBody>
-      </p:sp>
-      <p:sp>
-        <p:nvSpPr>
-          <p:cNvPr id="9" name="TextBox 8"/>
-          <p:cNvSpPr txBox="1"/>
-          <p:nvPr/>
-        </p:nvSpPr>
-        <p:spPr>
-          <a:xfrm>
-            <a:off x="777240" y="4160520"/>
+              <a:t>MELT</a:t>
+            </a:r>
+          </a:p>
+        </p:txBody>
+      </p:sp>
+      <p:sp>
+        <p:nvSpPr>
+          <p:cNvPr id="13" name="TextBox 12"/>
+          <p:cNvSpPr txBox="1"/>
+          <p:nvPr/>
+        </p:nvSpPr>
+        <p:spPr>
+          <a:xfrm>
+            <a:off x="3383280" y="3566160"/>
+            <a:ext cx="7772400" cy="365760"/>
+          </a:xfrm>
+          <a:prstGeom prst="rect">
+            <a:avLst/>
+          </a:prstGeom>
+          <a:noFill/>
+        </p:spPr>
+        <p:txBody>
+          <a:bodyPr wrap="square" anchor="t" lIns="0" rIns="0" tIns="0" bIns="0">
+            <a:spAutoFit/>
+          </a:bodyPr>
+          <a:lstStyle/>
+          <a:p>
+            <a:pPr algn="l"/>
+            <a:r>
+              <a:rPr sz="1200" b="0" i="0">
+                <a:solidFill>
+                  <a:srgbClr val="A8A8A8"/>
+                </a:solidFill>
+                <a:latin typeface="Helvetica"/>
+              </a:rPr>
+              <a:t>Per-amount columns (cc1 = USD 200, cc2 = USD 500)  →  long form</a:t>
+            </a:r>
+          </a:p>
+        </p:txBody>
+      </p:sp>
+      <p:sp>
+        <p:nvSpPr>
+          <p:cNvPr id="14" name="TextBox 13"/>
+          <p:cNvSpPr txBox="1"/>
+          <p:nvPr/>
+        </p:nvSpPr>
+        <p:spPr>
+          <a:xfrm>
+            <a:off x="777240" y="4069080"/>
+            <a:ext cx="457200" cy="365760"/>
+          </a:xfrm>
+          <a:prstGeom prst="rect">
+            <a:avLst/>
+          </a:prstGeom>
+          <a:noFill/>
+        </p:spPr>
+        <p:txBody>
+          <a:bodyPr wrap="square" anchor="t" lIns="0" rIns="0" tIns="0" bIns="0">
+            <a:spAutoFit/>
+          </a:bodyPr>
+          <a:lstStyle/>
+          <a:p>
+            <a:pPr algn="l"/>
+            <a:r>
+              <a:rPr sz="1100" b="0" i="0">
+                <a:solidFill>
+                  <a:srgbClr val="6B6B6B"/>
+                </a:solidFill>
+                <a:latin typeface="Menlo"/>
+              </a:rPr>
+              <a:t>03</a:t>
+            </a:r>
+          </a:p>
+        </p:txBody>
+      </p:sp>
+      <p:sp>
+        <p:nvSpPr>
+          <p:cNvPr id="15" name="TextBox 14"/>
+          <p:cNvSpPr txBox="1"/>
+          <p:nvPr/>
+        </p:nvSpPr>
+        <p:spPr>
+          <a:xfrm>
+            <a:off x="1280160" y="4069080"/>
+            <a:ext cx="2377440" cy="365760"/>
+          </a:xfrm>
+          <a:prstGeom prst="rect">
+            <a:avLst/>
+          </a:prstGeom>
+          <a:noFill/>
+        </p:spPr>
+        <p:txBody>
+          <a:bodyPr wrap="square" anchor="t" lIns="0" rIns="0" tIns="0" bIns="0">
+            <a:spAutoFit/>
+          </a:bodyPr>
+          <a:lstStyle/>
+          <a:p>
+            <a:pPr algn="l"/>
+            <a:r>
+              <a:rPr sz="1200" b="1" i="0">
+                <a:solidFill>
+                  <a:srgbClr val="F2F2F2"/>
+                </a:solidFill>
+                <a:latin typeface="Menlo"/>
+              </a:rPr>
+              <a:t>DERIVE FEE</a:t>
+            </a:r>
+          </a:p>
+        </p:txBody>
+      </p:sp>
+      <p:sp>
+        <p:nvSpPr>
+          <p:cNvPr id="16" name="TextBox 15"/>
+          <p:cNvSpPr txBox="1"/>
+          <p:nvPr/>
+        </p:nvSpPr>
+        <p:spPr>
+          <a:xfrm>
+            <a:off x="3383280" y="4069080"/>
+            <a:ext cx="7772400" cy="365760"/>
+          </a:xfrm>
+          <a:prstGeom prst="rect">
+            <a:avLst/>
+          </a:prstGeom>
+          <a:noFill/>
+        </p:spPr>
+        <p:txBody>
+          <a:bodyPr wrap="square" anchor="t" lIns="0" rIns="0" tIns="0" bIns="0">
+            <a:spAutoFit/>
+          </a:bodyPr>
+          <a:lstStyle/>
+          <a:p>
+            <a:pPr algn="l"/>
+            <a:r>
+              <a:rPr sz="1200" b="0" i="0">
+                <a:solidFill>
+                  <a:srgbClr val="A8A8A8"/>
+                </a:solidFill>
+                <a:latin typeface="Helvetica"/>
+              </a:rPr>
+              <a:t>fee_pct = total_cost_pct − fx_margin_pct  ·  clipped at zero</a:t>
+            </a:r>
+          </a:p>
+        </p:txBody>
+      </p:sp>
+      <p:sp>
+        <p:nvSpPr>
+          <p:cNvPr id="17" name="TextBox 16"/>
+          <p:cNvSpPr txBox="1"/>
+          <p:nvPr/>
+        </p:nvSpPr>
+        <p:spPr>
+          <a:xfrm>
+            <a:off x="777240" y="4572000"/>
+            <a:ext cx="457200" cy="365760"/>
+          </a:xfrm>
+          <a:prstGeom prst="rect">
+            <a:avLst/>
+          </a:prstGeom>
+          <a:noFill/>
+        </p:spPr>
+        <p:txBody>
+          <a:bodyPr wrap="square" anchor="t" lIns="0" rIns="0" tIns="0" bIns="0">
+            <a:spAutoFit/>
+          </a:bodyPr>
+          <a:lstStyle/>
+          <a:p>
+            <a:pPr algn="l"/>
+            <a:r>
+              <a:rPr sz="1100" b="0" i="0">
+                <a:solidFill>
+                  <a:srgbClr val="6B6B6B"/>
+                </a:solidFill>
+                <a:latin typeface="Menlo"/>
+              </a:rPr>
+              <a:t>04</a:t>
+            </a:r>
+          </a:p>
+        </p:txBody>
+      </p:sp>
+      <p:sp>
+        <p:nvSpPr>
+          <p:cNvPr id="18" name="TextBox 17"/>
+          <p:cNvSpPr txBox="1"/>
+          <p:nvPr/>
+        </p:nvSpPr>
+        <p:spPr>
+          <a:xfrm>
+            <a:off x="1280160" y="4572000"/>
+            <a:ext cx="2377440" cy="365760"/>
+          </a:xfrm>
+          <a:prstGeom prst="rect">
+            <a:avLst/>
+          </a:prstGeom>
+          <a:noFill/>
+        </p:spPr>
+        <p:txBody>
+          <a:bodyPr wrap="square" anchor="t" lIns="0" rIns="0" tIns="0" bIns="0">
+            <a:spAutoFit/>
+          </a:bodyPr>
+          <a:lstStyle/>
+          <a:p>
+            <a:pPr algn="l"/>
+            <a:r>
+              <a:rPr sz="1200" b="1" i="0">
+                <a:solidFill>
+                  <a:srgbClr val="F2F2F2"/>
+                </a:solidFill>
+                <a:latin typeface="Menlo"/>
+              </a:rPr>
+              <a:t>MAP SPEED</a:t>
+            </a:r>
+          </a:p>
+        </p:txBody>
+      </p:sp>
+      <p:sp>
+        <p:nvSpPr>
+          <p:cNvPr id="19" name="TextBox 18"/>
+          <p:cNvSpPr txBox="1"/>
+          <p:nvPr/>
+        </p:nvSpPr>
+        <p:spPr>
+          <a:xfrm>
+            <a:off x="3383280" y="4572000"/>
+            <a:ext cx="7772400" cy="365760"/>
+          </a:xfrm>
+          <a:prstGeom prst="rect">
+            <a:avLst/>
+          </a:prstGeom>
+          <a:noFill/>
+        </p:spPr>
+        <p:txBody>
+          <a:bodyPr wrap="square" anchor="t" lIns="0" rIns="0" tIns="0" bIns="0">
+            <a:spAutoFit/>
+          </a:bodyPr>
+          <a:lstStyle/>
+          <a:p>
+            <a:pPr algn="l"/>
+            <a:r>
+              <a:rPr sz="1200" b="0" i="0">
+                <a:solidFill>
+                  <a:srgbClr val="A8A8A8"/>
+                </a:solidFill>
+                <a:latin typeface="Helvetica"/>
+              </a:rPr>
+              <a:t>RPW "speed actual" categorical  →  days_to_arrive scalar  →  speed penalty</a:t>
+            </a:r>
+          </a:p>
+        </p:txBody>
+      </p:sp>
+      <p:sp>
+        <p:nvSpPr>
+          <p:cNvPr id="20" name="TextBox 19"/>
+          <p:cNvSpPr txBox="1"/>
+          <p:nvPr/>
+        </p:nvSpPr>
+        <p:spPr>
+          <a:xfrm>
+            <a:off x="777240" y="5074920"/>
+            <a:ext cx="457200" cy="365760"/>
+          </a:xfrm>
+          <a:prstGeom prst="rect">
+            <a:avLst/>
+          </a:prstGeom>
+          <a:noFill/>
+        </p:spPr>
+        <p:txBody>
+          <a:bodyPr wrap="square" anchor="t" lIns="0" rIns="0" tIns="0" bIns="0">
+            <a:spAutoFit/>
+          </a:bodyPr>
+          <a:lstStyle/>
+          <a:p>
+            <a:pPr algn="l"/>
+            <a:r>
+              <a:rPr sz="1100" b="0" i="0">
+                <a:solidFill>
+                  <a:srgbClr val="6B6B6B"/>
+                </a:solidFill>
+                <a:latin typeface="Menlo"/>
+              </a:rPr>
+              <a:t>05</a:t>
+            </a:r>
+          </a:p>
+        </p:txBody>
+      </p:sp>
+      <p:sp>
+        <p:nvSpPr>
+          <p:cNvPr id="21" name="TextBox 20"/>
+          <p:cNvSpPr txBox="1"/>
+          <p:nvPr/>
+        </p:nvSpPr>
+        <p:spPr>
+          <a:xfrm>
+            <a:off x="1280160" y="5074920"/>
+            <a:ext cx="2377440" cy="365760"/>
+          </a:xfrm>
+          <a:prstGeom prst="rect">
+            <a:avLst/>
+          </a:prstGeom>
+          <a:noFill/>
+        </p:spPr>
+        <p:txBody>
+          <a:bodyPr wrap="square" anchor="t" lIns="0" rIns="0" tIns="0" bIns="0">
+            <a:spAutoFit/>
+          </a:bodyPr>
+          <a:lstStyle/>
+          <a:p>
+            <a:pPr algn="l"/>
+            <a:r>
+              <a:rPr sz="1200" b="1" i="0">
+                <a:solidFill>
+                  <a:srgbClr val="F2F2F2"/>
+                </a:solidFill>
+                <a:latin typeface="Menlo"/>
+              </a:rPr>
+              <a:t>FILTER</a:t>
+            </a:r>
+          </a:p>
+        </p:txBody>
+      </p:sp>
+      <p:sp>
+        <p:nvSpPr>
+          <p:cNvPr id="22" name="TextBox 21"/>
+          <p:cNvSpPr txBox="1"/>
+          <p:nvPr/>
+        </p:nvSpPr>
+        <p:spPr>
+          <a:xfrm>
+            <a:off x="3383280" y="5074920"/>
+            <a:ext cx="7772400" cy="365760"/>
+          </a:xfrm>
+          <a:prstGeom prst="rect">
+            <a:avLst/>
+          </a:prstGeom>
+          <a:noFill/>
+        </p:spPr>
+        <p:txBody>
+          <a:bodyPr wrap="square" anchor="t" lIns="0" rIns="0" tIns="0" bIns="0">
+            <a:spAutoFit/>
+          </a:bodyPr>
+          <a:lstStyle/>
+          <a:p>
+            <a:pPr algn="l"/>
+            <a:r>
+              <a:rPr sz="1200" b="0" i="0">
+                <a:solidFill>
+                  <a:srgbClr val="A8A8A8"/>
+                </a:solidFill>
+                <a:latin typeface="Helvetica"/>
+              </a:rPr>
+              <a:t>Drop rows missing any TCI input  ·  log dropped count for QA</a:t>
+            </a:r>
+          </a:p>
+        </p:txBody>
+      </p:sp>
+      <p:sp>
+        <p:nvSpPr>
+          <p:cNvPr id="23" name="TextBox 22"/>
+          <p:cNvSpPr txBox="1"/>
+          <p:nvPr/>
+        </p:nvSpPr>
+        <p:spPr>
+          <a:xfrm>
+            <a:off x="777240" y="5577840"/>
+            <a:ext cx="457200" cy="365760"/>
+          </a:xfrm>
+          <a:prstGeom prst="rect">
+            <a:avLst/>
+          </a:prstGeom>
+          <a:noFill/>
+        </p:spPr>
+        <p:txBody>
+          <a:bodyPr wrap="square" anchor="t" lIns="0" rIns="0" tIns="0" bIns="0">
+            <a:spAutoFit/>
+          </a:bodyPr>
+          <a:lstStyle/>
+          <a:p>
+            <a:pPr algn="l"/>
+            <a:r>
+              <a:rPr sz="1100" b="0" i="0">
+                <a:solidFill>
+                  <a:srgbClr val="6B6B6B"/>
+                </a:solidFill>
+                <a:latin typeface="Menlo"/>
+              </a:rPr>
+              <a:t>06</a:t>
+            </a:r>
+          </a:p>
+        </p:txBody>
+      </p:sp>
+      <p:sp>
+        <p:nvSpPr>
+          <p:cNvPr id="24" name="TextBox 23"/>
+          <p:cNvSpPr txBox="1"/>
+          <p:nvPr/>
+        </p:nvSpPr>
+        <p:spPr>
+          <a:xfrm>
+            <a:off x="1280160" y="5577840"/>
+            <a:ext cx="2377440" cy="365760"/>
+          </a:xfrm>
+          <a:prstGeom prst="rect">
+            <a:avLst/>
+          </a:prstGeom>
+          <a:noFill/>
+        </p:spPr>
+        <p:txBody>
+          <a:bodyPr wrap="square" anchor="t" lIns="0" rIns="0" tIns="0" bIns="0">
+            <a:spAutoFit/>
+          </a:bodyPr>
+          <a:lstStyle/>
+          <a:p>
+            <a:pPr algn="l"/>
+            <a:r>
+              <a:rPr sz="1200" b="1" i="0">
+                <a:solidFill>
+                  <a:srgbClr val="F2F2F2"/>
+                </a:solidFill>
+                <a:latin typeface="Menlo"/>
+              </a:rPr>
+              <a:t>NORMALIZE</a:t>
+            </a:r>
+          </a:p>
+        </p:txBody>
+      </p:sp>
+      <p:sp>
+        <p:nvSpPr>
+          <p:cNvPr id="25" name="TextBox 24"/>
+          <p:cNvSpPr txBox="1"/>
+          <p:nvPr/>
+        </p:nvSpPr>
+        <p:spPr>
+          <a:xfrm>
+            <a:off x="3383280" y="5577840"/>
+            <a:ext cx="7772400" cy="365760"/>
+          </a:xfrm>
+          <a:prstGeom prst="rect">
+            <a:avLst/>
+          </a:prstGeom>
+          <a:noFill/>
+        </p:spPr>
+        <p:txBody>
+          <a:bodyPr wrap="square" anchor="t" lIns="0" rIns="0" tIns="0" bIns="0">
+            <a:spAutoFit/>
+          </a:bodyPr>
+          <a:lstStyle/>
+          <a:p>
+            <a:pPr algn="l"/>
+            <a:r>
+              <a:rPr sz="1200" b="0" i="0">
+                <a:solidFill>
+                  <a:srgbClr val="A8A8A8"/>
+                </a:solidFill>
+                <a:latin typeface="Helvetica"/>
+              </a:rPr>
+              <a:t>Standardize firm_type to {Bank, MTO, MobileMoney, PostOffice, Fintech}</a:t>
+            </a:r>
+          </a:p>
+        </p:txBody>
+      </p:sp>
+      <p:sp>
+        <p:nvSpPr>
+          <p:cNvPr id="26" name="TextBox 25"/>
+          <p:cNvSpPr txBox="1"/>
+          <p:nvPr/>
+        </p:nvSpPr>
+        <p:spPr>
+          <a:xfrm>
+            <a:off x="777240" y="6263640"/>
             <a:ext cx="10515600" cy="365760"/>
           </a:xfrm>
           <a:prstGeom prst="rect">
@@ -9020,147 +10727,7 @@
                 </a:solidFill>
                 <a:latin typeface="Menlo"/>
               </a:rPr>
-              <a:t>DEFAULTS</a:t>
-            </a:r>
-          </a:p>
-        </p:txBody>
-      </p:sp>
-      <p:sp>
-        <p:nvSpPr>
-          <p:cNvPr id="10" name="TextBox 9"/>
-          <p:cNvSpPr txBox="1"/>
-          <p:nvPr/>
-        </p:nvSpPr>
-        <p:spPr>
-          <a:xfrm>
-            <a:off x="777240" y="4507992"/>
-            <a:ext cx="10515600" cy="457200"/>
-          </a:xfrm>
-          <a:prstGeom prst="rect">
-            <a:avLst/>
-          </a:prstGeom>
-          <a:noFill/>
-        </p:spPr>
-        <p:txBody>
-          <a:bodyPr wrap="square" anchor="t" lIns="0" rIns="0" tIns="0" bIns="0">
-            <a:spAutoFit/>
-          </a:bodyPr>
-          <a:lstStyle/>
-          <a:p>
-            <a:pPr algn="l"/>
-            <a:r>
-              <a:rPr sz="1400" b="0" i="0">
-                <a:solidFill>
-                  <a:srgbClr val="A8A8A8"/>
-                </a:solidFill>
-                <a:latin typeface="Helvetica"/>
-              </a:rPr>
-              <a:t>On-ramp  ·  1.0 % developed  /  1.5 % default  /  2.5 % low-banked</a:t>
-            </a:r>
-          </a:p>
-        </p:txBody>
-      </p:sp>
-      <p:sp>
-        <p:nvSpPr>
-          <p:cNvPr id="11" name="TextBox 10"/>
-          <p:cNvSpPr txBox="1"/>
-          <p:nvPr/>
-        </p:nvSpPr>
-        <p:spPr>
-          <a:xfrm>
-            <a:off x="777240" y="4919472"/>
-            <a:ext cx="10515600" cy="457200"/>
-          </a:xfrm>
-          <a:prstGeom prst="rect">
-            <a:avLst/>
-          </a:prstGeom>
-          <a:noFill/>
-        </p:spPr>
-        <p:txBody>
-          <a:bodyPr wrap="square" anchor="t" lIns="0" rIns="0" tIns="0" bIns="0">
-            <a:spAutoFit/>
-          </a:bodyPr>
-          <a:lstStyle/>
-          <a:p>
-            <a:pPr algn="l"/>
-            <a:r>
-              <a:rPr sz="1400" b="0" i="0">
-                <a:solidFill>
-                  <a:srgbClr val="A8A8A8"/>
-                </a:solidFill>
-                <a:latin typeface="Helvetica"/>
-              </a:rPr>
-              <a:t>Off-ramp  ·  1.0 % top P2P  /  2.5 % default  /  4.0 % thin liquidity</a:t>
-            </a:r>
-          </a:p>
-        </p:txBody>
-      </p:sp>
-      <p:sp>
-        <p:nvSpPr>
-          <p:cNvPr id="12" name="TextBox 11"/>
-          <p:cNvSpPr txBox="1"/>
-          <p:nvPr/>
-        </p:nvSpPr>
-        <p:spPr>
-          <a:xfrm>
-            <a:off x="777240" y="5330952"/>
-            <a:ext cx="10515600" cy="457200"/>
-          </a:xfrm>
-          <a:prstGeom prst="rect">
-            <a:avLst/>
-          </a:prstGeom>
-          <a:noFill/>
-        </p:spPr>
-        <p:txBody>
-          <a:bodyPr wrap="square" anchor="t" lIns="0" rIns="0" tIns="0" bIns="0">
-            <a:spAutoFit/>
-          </a:bodyPr>
-          <a:lstStyle/>
-          <a:p>
-            <a:pPr algn="l"/>
-            <a:r>
-              <a:rPr sz="1400" b="0" i="0">
-                <a:solidFill>
-                  <a:srgbClr val="A8A8A8"/>
-                </a:solidFill>
-                <a:latin typeface="Helvetica"/>
-              </a:rPr>
-              <a:t>Gas $0.50 (L2 / Solana / Tron USDT)  ·  fxSpread 0.5 % deep / 1.5 % default</a:t>
-            </a:r>
-          </a:p>
-        </p:txBody>
-      </p:sp>
-      <p:sp>
-        <p:nvSpPr>
-          <p:cNvPr id="13" name="TextBox 12"/>
-          <p:cNvSpPr txBox="1"/>
-          <p:nvPr/>
-        </p:nvSpPr>
-        <p:spPr>
-          <a:xfrm>
-            <a:off x="777240" y="5742432"/>
-            <a:ext cx="10515600" cy="457200"/>
-          </a:xfrm>
-          <a:prstGeom prst="rect">
-            <a:avLst/>
-          </a:prstGeom>
-          <a:noFill/>
-        </p:spPr>
-        <p:txBody>
-          <a:bodyPr wrap="square" anchor="t" lIns="0" rIns="0" tIns="0" bIns="0">
-            <a:spAutoFit/>
-          </a:bodyPr>
-          <a:lstStyle/>
-          <a:p>
-            <a:pPr algn="l"/>
-            <a:r>
-              <a:rPr sz="1400" b="0" i="1">
-                <a:solidFill>
-                  <a:srgbClr val="6B6B6B"/>
-                </a:solidFill>
-                <a:latin typeface="Helvetica"/>
-              </a:rPr>
-              <a:t>Volume V(s,d) is the KNOMAD bilateral remittance estimate, 2021 (latest published).</a:t>
+              <a:t>OUTPUT  ·  391,797 clean rows  ·  Parquet for downstream stages.</a:t>
             </a:r>
           </a:p>
         </p:txBody>
@@ -9256,7 +10823,7 @@
                 </a:solidFill>
                 <a:latin typeface="Menlo"/>
               </a:rPr>
-              <a:t>07  ·  METHODOLOGY  ·  REGRESSION</a:t>
+              <a:t>07  ·  METHODOLOGY  ·  TRUE COST INDEX</a:t>
             </a:r>
           </a:p>
         </p:txBody>
@@ -9291,7 +10858,7 @@
                 </a:solidFill>
                 <a:latin typeface="Menlo"/>
               </a:rPr>
-              <a:t>08 / 17</a:t>
+              <a:t>08 / 18</a:t>
             </a:r>
           </a:p>
         </p:txBody>
@@ -9355,13 +10922,13 @@
           <a:p>
             <a:pPr algn="l"/>
             <a:r>
-              <a:rPr sz="4000" b="1" i="0">
+              <a:rPr sz="4400" b="1" i="0">
                 <a:solidFill>
                   <a:srgbClr val="F2F2F2"/>
                 </a:solidFill>
                 <a:latin typeface="Helvetica Neue"/>
               </a:rPr>
-              <a:t>Operator-class regression.</a:t>
+              <a:t>True Cost Index.</a:t>
             </a:r>
           </a:p>
         </p:txBody>
@@ -9374,29 +10941,29 @@
         </p:nvSpPr>
         <p:spPr>
           <a:xfrm>
-            <a:off x="777240" y="2606040"/>
-            <a:ext cx="10972800" cy="914400"/>
-          </a:xfrm>
-          <a:prstGeom prst="rect">
-            <a:avLst/>
-          </a:prstGeom>
-          <a:noFill/>
-        </p:spPr>
-        <p:txBody>
-          <a:bodyPr wrap="square" anchor="t" lIns="0" rIns="0" tIns="0" bIns="0">
-            <a:spAutoFit/>
-          </a:bodyPr>
-          <a:lstStyle/>
-          <a:p>
-            <a:pPr algn="l"/>
-            <a:r>
-              <a:rPr sz="2200" b="0" i="0">
+            <a:off x="777240" y="2743200"/>
+            <a:ext cx="10972800" cy="1097280"/>
+          </a:xfrm>
+          <a:prstGeom prst="rect">
+            <a:avLst/>
+          </a:prstGeom>
+          <a:noFill/>
+        </p:spPr>
+        <p:txBody>
+          <a:bodyPr wrap="square" anchor="t" lIns="0" rIns="0" tIns="0" bIns="0">
+            <a:spAutoFit/>
+          </a:bodyPr>
+          <a:lstStyle/>
+          <a:p>
+            <a:pPr algn="l"/>
+            <a:r>
+              <a:rPr sz="2600" b="0" i="0">
                 <a:solidFill>
                   <a:srgbClr val="F2F2F2"/>
                 </a:solidFill>
                 <a:latin typeface="Menlo"/>
               </a:rPr>
-              <a:t>TCI_ipq  =  β₀  +  Σ β_k · 1{firmType = k}  +  α_corridor  +  γ_quarter  +  ε</a:t>
+              <a:t>TCI  =  fee%  +  fxMargin%  +  κ · max(0, days−1)</a:t>
             </a:r>
           </a:p>
         </p:txBody>
@@ -9409,7 +10976,42 @@
         </p:nvSpPr>
         <p:spPr>
           <a:xfrm>
-            <a:off x="777240" y="3840480"/>
+            <a:off x="777240" y="4023360"/>
+            <a:ext cx="10515600" cy="365760"/>
+          </a:xfrm>
+          <a:prstGeom prst="rect">
+            <a:avLst/>
+          </a:prstGeom>
+          <a:noFill/>
+        </p:spPr>
+        <p:txBody>
+          <a:bodyPr wrap="square" anchor="t" lIns="0" rIns="0" tIns="0" bIns="0">
+            <a:spAutoFit/>
+          </a:bodyPr>
+          <a:lstStyle/>
+          <a:p>
+            <a:pPr algn="l"/>
+            <a:r>
+              <a:rPr sz="1000" b="0" i="0">
+                <a:solidFill>
+                  <a:srgbClr val="6B6B6B"/>
+                </a:solidFill>
+                <a:latin typeface="Menlo"/>
+              </a:rPr>
+              <a:t>WHERE</a:t>
+            </a:r>
+          </a:p>
+        </p:txBody>
+      </p:sp>
+      <p:sp>
+        <p:nvSpPr>
+          <p:cNvPr id="9" name="TextBox 8"/>
+          <p:cNvSpPr txBox="1"/>
+          <p:nvPr/>
+        </p:nvSpPr>
+        <p:spPr>
+          <a:xfrm>
+            <a:off x="777240" y="4370832"/>
             <a:ext cx="10515600" cy="457200"/>
           </a:xfrm>
           <a:prstGeom prst="rect">
@@ -9425,26 +11027,26 @@
           <a:p>
             <a:pPr algn="l"/>
             <a:r>
-              <a:rPr sz="1800" b="0" i="0">
+              <a:rPr sz="1500" b="0" i="0">
                 <a:solidFill>
                   <a:srgbClr val="A8A8A8"/>
                 </a:solidFill>
                 <a:latin typeface="Helvetica"/>
               </a:rPr>
-              <a:t>Two-way fixed effects  ·  corridor and quarter absorbed.</a:t>
-            </a:r>
-          </a:p>
-        </p:txBody>
-      </p:sp>
-      <p:sp>
-        <p:nvSpPr>
-          <p:cNvPr id="9" name="TextBox 8"/>
-          <p:cNvSpPr txBox="1"/>
-          <p:nvPr/>
-        </p:nvSpPr>
-        <p:spPr>
-          <a:xfrm>
-            <a:off x="777240" y="4434840"/>
+              <a:t>κ = 0.10 % per day past same-day  ·  cost-of-capital proxy for the receiving household</a:t>
+            </a:r>
+          </a:p>
+        </p:txBody>
+      </p:sp>
+      <p:sp>
+        <p:nvSpPr>
+          <p:cNvPr id="10" name="TextBox 9"/>
+          <p:cNvSpPr txBox="1"/>
+          <p:nvPr/>
+        </p:nvSpPr>
+        <p:spPr>
+          <a:xfrm>
+            <a:off x="777240" y="4846320"/>
             <a:ext cx="10515600" cy="457200"/>
           </a:xfrm>
           <a:prstGeom prst="rect">
@@ -9460,26 +11062,26 @@
           <a:p>
             <a:pPr algn="l"/>
             <a:r>
-              <a:rPr sz="1800" b="0" i="0">
+              <a:rPr sz="1500" b="0" i="0">
                 <a:solidFill>
                   <a:srgbClr val="A8A8A8"/>
                 </a:solidFill>
                 <a:latin typeface="Helvetica"/>
               </a:rPr>
-              <a:t>Reference category  ·  MTO (largest cell).</a:t>
-            </a:r>
-          </a:p>
-        </p:txBody>
-      </p:sp>
-      <p:sp>
-        <p:nvSpPr>
-          <p:cNvPr id="10" name="TextBox 9"/>
-          <p:cNvSpPr txBox="1"/>
-          <p:nvPr/>
-        </p:nvSpPr>
-        <p:spPr>
-          <a:xfrm>
-            <a:off x="777240" y="5029200"/>
+              <a:t>days  ·  RPW "speed actual" mapped to (under 1h, same day) → 0,  next day → 1,  2d → 2,  3-5d → 4</a:t>
+            </a:r>
+          </a:p>
+        </p:txBody>
+      </p:sp>
+      <p:sp>
+        <p:nvSpPr>
+          <p:cNvPr id="11" name="TextBox 10"/>
+          <p:cNvSpPr txBox="1"/>
+          <p:nvPr/>
+        </p:nvSpPr>
+        <p:spPr>
+          <a:xfrm>
+            <a:off x="777240" y="5321808"/>
             <a:ext cx="10515600" cy="457200"/>
           </a:xfrm>
           <a:prstGeom prst="rect">
@@ -9495,48 +11097,13 @@
           <a:p>
             <a:pPr algn="l"/>
             <a:r>
-              <a:rPr sz="1800" b="0" i="0">
+              <a:rPr sz="1500" b="0" i="0">
                 <a:solidFill>
                   <a:srgbClr val="A8A8A8"/>
                 </a:solidFill>
                 <a:latin typeface="Helvetica"/>
               </a:rPr>
-              <a:t>Standard errors  ·  cluster-robust at the corridor level.</a:t>
-            </a:r>
-          </a:p>
-        </p:txBody>
-      </p:sp>
-      <p:sp>
-        <p:nvSpPr>
-          <p:cNvPr id="11" name="TextBox 10"/>
-          <p:cNvSpPr txBox="1"/>
-          <p:nvPr/>
-        </p:nvSpPr>
-        <p:spPr>
-          <a:xfrm>
-            <a:off x="777240" y="5623560"/>
-            <a:ext cx="10515600" cy="457200"/>
-          </a:xfrm>
-          <a:prstGeom prst="rect">
-            <a:avLst/>
-          </a:prstGeom>
-          <a:noFill/>
-        </p:spPr>
-        <p:txBody>
-          <a:bodyPr wrap="square" anchor="t" lIns="0" rIns="0" tIns="0" bIns="0">
-            <a:spAutoFit/>
-          </a:bodyPr>
-          <a:lstStyle/>
-          <a:p>
-            <a:pPr algn="l"/>
-            <a:r>
-              <a:rPr sz="1800" b="0" i="0">
-                <a:solidFill>
-                  <a:srgbClr val="A8A8A8"/>
-                </a:solidFill>
-                <a:latin typeface="Helvetica"/>
-              </a:rPr>
-              <a:t>Implementation  ·  linearmodels.PanelOLS, run separately for the USD 200 and USD 500 buckets.</a:t>
+              <a:t>Corridor-level TCI is the unweighted mean across providers; median reported as a robustness check.</a:t>
             </a:r>
           </a:p>
         </p:txBody>
@@ -9632,7 +11199,7 @@
                 </a:solidFill>
                 <a:latin typeface="Menlo"/>
               </a:rPr>
-              <a:t>08  ·  ARCHITECTURE</a:t>
+              <a:t>08  ·  METHODOLOGY  ·  STABLECOIN</a:t>
             </a:r>
           </a:p>
         </p:txBody>
@@ -9667,7 +11234,7 @@
                 </a:solidFill>
                 <a:latin typeface="Menlo"/>
               </a:rPr>
-              <a:t>09 / 17</a:t>
+              <a:t>09 / 18</a:t>
             </a:r>
           </a:p>
         </p:txBody>
@@ -9715,102 +11282,278 @@
         </p:nvSpPr>
         <p:spPr>
           <a:xfrm>
-            <a:off x="777240" y="1143000"/>
-            <a:ext cx="10515600" cy="640080"/>
-          </a:xfrm>
-          <a:prstGeom prst="rect">
-            <a:avLst/>
-          </a:prstGeom>
-          <a:noFill/>
-        </p:spPr>
-        <p:txBody>
-          <a:bodyPr wrap="square" anchor="t" lIns="0" rIns="0" tIns="0" bIns="0">
-            <a:spAutoFit/>
-          </a:bodyPr>
-          <a:lstStyle/>
-          <a:p>
-            <a:pPr algn="l"/>
-            <a:r>
-              <a:rPr sz="2800" b="1" i="0">
+            <a:off x="777240" y="1463040"/>
+            <a:ext cx="10515600" cy="822960"/>
+          </a:xfrm>
+          <a:prstGeom prst="rect">
+            <a:avLst/>
+          </a:prstGeom>
+          <a:noFill/>
+        </p:spPr>
+        <p:txBody>
+          <a:bodyPr wrap="square" anchor="t" lIns="0" rIns="0" tIns="0" bIns="0">
+            <a:spAutoFit/>
+          </a:bodyPr>
+          <a:lstStyle/>
+          <a:p>
+            <a:pPr algn="l"/>
+            <a:r>
+              <a:rPr sz="4400" b="1" i="0">
                 <a:solidFill>
                   <a:srgbClr val="F2F2F2"/>
                 </a:solidFill>
                 <a:latin typeface="Helvetica Neue"/>
               </a:rPr>
-              <a:t>From raw RPW to a static dashboard.</a:t>
-            </a:r>
-          </a:p>
-        </p:txBody>
-      </p:sp>
-      <p:sp>
-        <p:nvSpPr>
-          <p:cNvPr id="7" name="Rounded Rectangle 6"/>
-          <p:cNvSpPr/>
-          <p:nvPr/>
-        </p:nvSpPr>
-        <p:spPr>
-          <a:xfrm>
-            <a:off x="3297120" y="1801368"/>
-            <a:ext cx="5597455" cy="4809744"/>
-          </a:xfrm>
-          <a:prstGeom prst="roundRect">
-            <a:avLst>
-              <a:gd name="adj" fmla="val 1200"/>
-            </a:avLst>
-          </a:prstGeom>
-          <a:solidFill>
-            <a:srgbClr val="FAFAFA"/>
-          </a:solidFill>
-          <a:ln>
-            <a:noFill/>
-          </a:ln>
-        </p:spPr>
-        <p:style>
-          <a:lnRef idx="1">
-            <a:schemeClr val="accent1"/>
-          </a:lnRef>
-          <a:fillRef idx="3">
-            <a:schemeClr val="accent1"/>
-          </a:fillRef>
-          <a:effectRef idx="2">
-            <a:schemeClr val="accent1"/>
-          </a:effectRef>
-          <a:fontRef idx="minor">
-            <a:schemeClr val="lt1"/>
-          </a:fontRef>
-        </p:style>
-        <p:txBody>
-          <a:bodyPr rtlCol="0" anchor="ctr"/>
-          <a:lstStyle/>
-          <a:p>
-            <a:pPr algn="ctr"/>
-          </a:p>
-        </p:txBody>
-      </p:sp>
-      <p:pic>
-        <p:nvPicPr>
-          <p:cNvPr id="8" name="Picture 7" descr="architecture.png"/>
-          <p:cNvPicPr>
-            <a:picLocks noChangeAspect="1"/>
-          </p:cNvPicPr>
-          <p:nvPr/>
-        </p:nvPicPr>
-        <p:blipFill>
-          <a:blip r:embed="rId2"/>
-          <a:stretch>
-            <a:fillRect/>
-          </a:stretch>
-        </p:blipFill>
-        <p:spPr>
-          <a:xfrm>
-            <a:off x="3461712" y="1965960"/>
-            <a:ext cx="5268271" cy="4480560"/>
-          </a:xfrm>
-          <a:prstGeom prst="rect">
-            <a:avLst/>
-          </a:prstGeom>
-        </p:spPr>
-      </p:pic>
+              <a:t>Stablecoin counterfactual.</a:t>
+            </a:r>
+          </a:p>
+        </p:txBody>
+      </p:sp>
+      <p:sp>
+        <p:nvSpPr>
+          <p:cNvPr id="7" name="TextBox 6"/>
+          <p:cNvSpPr txBox="1"/>
+          <p:nvPr/>
+        </p:nvSpPr>
+        <p:spPr>
+          <a:xfrm>
+            <a:off x="777240" y="2606040"/>
+            <a:ext cx="10972800" cy="914400"/>
+          </a:xfrm>
+          <a:prstGeom prst="rect">
+            <a:avLst/>
+          </a:prstGeom>
+          <a:noFill/>
+        </p:spPr>
+        <p:txBody>
+          <a:bodyPr wrap="square" anchor="t" lIns="0" rIns="0" tIns="0" bIns="0">
+            <a:spAutoFit/>
+          </a:bodyPr>
+          <a:lstStyle/>
+          <a:p>
+            <a:pPr algn="l"/>
+            <a:r>
+              <a:rPr sz="2200" b="0" i="0">
+                <a:solidFill>
+                  <a:srgbClr val="F2F2F2"/>
+                </a:solidFill>
+                <a:latin typeface="Menlo"/>
+              </a:rPr>
+              <a:t>SC = onramp(s)  +  offramp(d)  +  (gas / A × 100)  +  fxSpread(d)</a:t>
+            </a:r>
+          </a:p>
+        </p:txBody>
+      </p:sp>
+      <p:sp>
+        <p:nvSpPr>
+          <p:cNvPr id="8" name="TextBox 7"/>
+          <p:cNvSpPr txBox="1"/>
+          <p:nvPr/>
+        </p:nvSpPr>
+        <p:spPr>
+          <a:xfrm>
+            <a:off x="777240" y="3246120"/>
+            <a:ext cx="10972800" cy="914400"/>
+          </a:xfrm>
+          <a:prstGeom prst="rect">
+            <a:avLst/>
+          </a:prstGeom>
+          <a:noFill/>
+        </p:spPr>
+        <p:txBody>
+          <a:bodyPr wrap="square" anchor="t" lIns="0" rIns="0" tIns="0" bIns="0">
+            <a:spAutoFit/>
+          </a:bodyPr>
+          <a:lstStyle/>
+          <a:p>
+            <a:pPr algn="l"/>
+            <a:r>
+              <a:rPr sz="2200" b="0" i="0">
+                <a:solidFill>
+                  <a:srgbClr val="F2F2F2"/>
+                </a:solidFill>
+                <a:latin typeface="Menlo"/>
+              </a:rPr>
+              <a:t>savings = max(0,  TCI  −  SC)  ·  V(s,d)</a:t>
+            </a:r>
+          </a:p>
+        </p:txBody>
+      </p:sp>
+      <p:sp>
+        <p:nvSpPr>
+          <p:cNvPr id="9" name="TextBox 8"/>
+          <p:cNvSpPr txBox="1"/>
+          <p:nvPr/>
+        </p:nvSpPr>
+        <p:spPr>
+          <a:xfrm>
+            <a:off x="777240" y="4160520"/>
+            <a:ext cx="10515600" cy="365760"/>
+          </a:xfrm>
+          <a:prstGeom prst="rect">
+            <a:avLst/>
+          </a:prstGeom>
+          <a:noFill/>
+        </p:spPr>
+        <p:txBody>
+          <a:bodyPr wrap="square" anchor="t" lIns="0" rIns="0" tIns="0" bIns="0">
+            <a:spAutoFit/>
+          </a:bodyPr>
+          <a:lstStyle/>
+          <a:p>
+            <a:pPr algn="l"/>
+            <a:r>
+              <a:rPr sz="1000" b="0" i="0">
+                <a:solidFill>
+                  <a:srgbClr val="6B6B6B"/>
+                </a:solidFill>
+                <a:latin typeface="Menlo"/>
+              </a:rPr>
+              <a:t>DEFAULTS</a:t>
+            </a:r>
+          </a:p>
+        </p:txBody>
+      </p:sp>
+      <p:sp>
+        <p:nvSpPr>
+          <p:cNvPr id="10" name="TextBox 9"/>
+          <p:cNvSpPr txBox="1"/>
+          <p:nvPr/>
+        </p:nvSpPr>
+        <p:spPr>
+          <a:xfrm>
+            <a:off x="777240" y="4507992"/>
+            <a:ext cx="10515600" cy="457200"/>
+          </a:xfrm>
+          <a:prstGeom prst="rect">
+            <a:avLst/>
+          </a:prstGeom>
+          <a:noFill/>
+        </p:spPr>
+        <p:txBody>
+          <a:bodyPr wrap="square" anchor="t" lIns="0" rIns="0" tIns="0" bIns="0">
+            <a:spAutoFit/>
+          </a:bodyPr>
+          <a:lstStyle/>
+          <a:p>
+            <a:pPr algn="l"/>
+            <a:r>
+              <a:rPr sz="1400" b="0" i="0">
+                <a:solidFill>
+                  <a:srgbClr val="A8A8A8"/>
+                </a:solidFill>
+                <a:latin typeface="Helvetica"/>
+              </a:rPr>
+              <a:t>On-ramp  ·  1.0 % developed  /  1.5 % default  /  2.5 % low-banked</a:t>
+            </a:r>
+          </a:p>
+        </p:txBody>
+      </p:sp>
+      <p:sp>
+        <p:nvSpPr>
+          <p:cNvPr id="11" name="TextBox 10"/>
+          <p:cNvSpPr txBox="1"/>
+          <p:nvPr/>
+        </p:nvSpPr>
+        <p:spPr>
+          <a:xfrm>
+            <a:off x="777240" y="4919472"/>
+            <a:ext cx="10515600" cy="457200"/>
+          </a:xfrm>
+          <a:prstGeom prst="rect">
+            <a:avLst/>
+          </a:prstGeom>
+          <a:noFill/>
+        </p:spPr>
+        <p:txBody>
+          <a:bodyPr wrap="square" anchor="t" lIns="0" rIns="0" tIns="0" bIns="0">
+            <a:spAutoFit/>
+          </a:bodyPr>
+          <a:lstStyle/>
+          <a:p>
+            <a:pPr algn="l"/>
+            <a:r>
+              <a:rPr sz="1400" b="0" i="0">
+                <a:solidFill>
+                  <a:srgbClr val="A8A8A8"/>
+                </a:solidFill>
+                <a:latin typeface="Helvetica"/>
+              </a:rPr>
+              <a:t>Off-ramp  ·  1.0 % top P2P  /  2.5 % default  /  4.0 % thin liquidity</a:t>
+            </a:r>
+          </a:p>
+        </p:txBody>
+      </p:sp>
+      <p:sp>
+        <p:nvSpPr>
+          <p:cNvPr id="12" name="TextBox 11"/>
+          <p:cNvSpPr txBox="1"/>
+          <p:nvPr/>
+        </p:nvSpPr>
+        <p:spPr>
+          <a:xfrm>
+            <a:off x="777240" y="5330952"/>
+            <a:ext cx="10515600" cy="457200"/>
+          </a:xfrm>
+          <a:prstGeom prst="rect">
+            <a:avLst/>
+          </a:prstGeom>
+          <a:noFill/>
+        </p:spPr>
+        <p:txBody>
+          <a:bodyPr wrap="square" anchor="t" lIns="0" rIns="0" tIns="0" bIns="0">
+            <a:spAutoFit/>
+          </a:bodyPr>
+          <a:lstStyle/>
+          <a:p>
+            <a:pPr algn="l"/>
+            <a:r>
+              <a:rPr sz="1400" b="0" i="0">
+                <a:solidFill>
+                  <a:srgbClr val="A8A8A8"/>
+                </a:solidFill>
+                <a:latin typeface="Helvetica"/>
+              </a:rPr>
+              <a:t>Gas $0.50 (L2 / Solana / Tron USDT)  ·  fxSpread 0.5 % deep / 1.5 % default</a:t>
+            </a:r>
+          </a:p>
+        </p:txBody>
+      </p:sp>
+      <p:sp>
+        <p:nvSpPr>
+          <p:cNvPr id="13" name="TextBox 12"/>
+          <p:cNvSpPr txBox="1"/>
+          <p:nvPr/>
+        </p:nvSpPr>
+        <p:spPr>
+          <a:xfrm>
+            <a:off x="777240" y="5742432"/>
+            <a:ext cx="10515600" cy="457200"/>
+          </a:xfrm>
+          <a:prstGeom prst="rect">
+            <a:avLst/>
+          </a:prstGeom>
+          <a:noFill/>
+        </p:spPr>
+        <p:txBody>
+          <a:bodyPr wrap="square" anchor="t" lIns="0" rIns="0" tIns="0" bIns="0">
+            <a:spAutoFit/>
+          </a:bodyPr>
+          <a:lstStyle/>
+          <a:p>
+            <a:pPr algn="l"/>
+            <a:r>
+              <a:rPr sz="1400" b="0" i="1">
+                <a:solidFill>
+                  <a:srgbClr val="6B6B6B"/>
+                </a:solidFill>
+                <a:latin typeface="Helvetica"/>
+              </a:rPr>
+              <a:t>Volume V(s,d) is the KNOMAD bilateral remittance estimate, 2021 (latest published).</a:t>
+            </a:r>
+          </a:p>
+        </p:txBody>
+      </p:sp>
     </p:spTree>
   </p:cSld>
   <p:clrMapOvr>
